--- a/TECH-SOLUTIONS.pptx
+++ b/TECH-SOLUTIONS.pptx
@@ -1,18 +1,18 @@
 
 <file path=ppt/presentation.xml><?xml version="1.0" encoding="utf-8"?>
-<p:presentation xmlns:a="http://schemas.openxmlformats.org/drawingml/2006/main" xmlns:r="http://schemas.openxmlformats.org/officeDocument/2006/relationships" xmlns:p="http://schemas.openxmlformats.org/presentationml/2006/main" saveSubsetFonts="1">
+<p:presentation xmlns:a="http://schemas.openxmlformats.org/drawingml/2006/main" xmlns:r="http://schemas.openxmlformats.org/officeDocument/2006/relationships" xmlns:p="http://schemas.openxmlformats.org/presentationml/2006/main">
   <p:sldMasterIdLst>
     <p:sldMasterId id="2147483648" r:id="rId1"/>
   </p:sldMasterIdLst>
   <p:handoutMasterIdLst>
-    <p:handoutMasterId r:id="rId7"/>
+    <p:handoutMasterId r:id="rId8"/>
   </p:handoutMasterIdLst>
   <p:sldIdLst>
-    <p:sldId id="256" r:id="rId2"/>
-    <p:sldId id="257" r:id="rId3"/>
-    <p:sldId id="258" r:id="rId4"/>
-    <p:sldId id="259" r:id="rId5"/>
-    <p:sldId id="260" r:id="rId6"/>
+    <p:sldId id="256" r:id="rId3"/>
+    <p:sldId id="257" r:id="rId4"/>
+    <p:sldId id="258" r:id="rId5"/>
+    <p:sldId id="259" r:id="rId6"/>
+    <p:sldId id="260" r:id="rId7"/>
   </p:sldIdLst>
   <p:sldSz cx="12192000" cy="6858000"/>
   <p:notesSz cx="6858000" cy="9144000"/>
@@ -138,13 +138,7 @@
       </p:grpSpPr>
       <p:sp>
         <p:nvSpPr>
-          <p:cNvPr id="2" name="Marcador de encabezado 1">
-            <a:extLst>
-              <a:ext uri="{FF2B5EF4-FFF2-40B4-BE49-F238E27FC236}">
-                <a16:creationId xmlns:a16="http://schemas.microsoft.com/office/drawing/2014/main" id="{CAE803A8-661C-4209-9DA2-941E4D48EFE7}"/>
-              </a:ext>
-            </a:extLst>
-          </p:cNvPr>
+          <p:cNvPr id="2" name="Marcador de encabezado 1"/>
           <p:cNvSpPr>
             <a:spLocks noGrp="1"/>
           </p:cNvSpPr>
@@ -175,13 +169,7 @@
       </p:sp>
       <p:sp>
         <p:nvSpPr>
-          <p:cNvPr id="3" name="Marcador de fecha 2">
-            <a:extLst>
-              <a:ext uri="{FF2B5EF4-FFF2-40B4-BE49-F238E27FC236}">
-                <a16:creationId xmlns:a16="http://schemas.microsoft.com/office/drawing/2014/main" id="{BDA5DD15-4FC8-4766-85B4-2F480DB2D22D}"/>
-              </a:ext>
-            </a:extLst>
-          </p:cNvPr>
+          <p:cNvPr id="3" name="Marcador de fecha 2"/>
           <p:cNvSpPr>
             <a:spLocks noGrp="1"/>
           </p:cNvSpPr>
@@ -208,7 +196,6 @@
           <a:p>
             <a:fld id="{E831E26A-A770-4C30-967A-45E589574EA5}" type="datetimeFigureOut">
               <a:rPr lang="es-BO" smtClean="0"/>
-              <a:t>1/6/2026</a:t>
             </a:fld>
             <a:endParaRPr lang="es-BO"/>
           </a:p>
@@ -216,13 +203,7 @@
       </p:sp>
       <p:sp>
         <p:nvSpPr>
-          <p:cNvPr id="4" name="Marcador de pie de página 3">
-            <a:extLst>
-              <a:ext uri="{FF2B5EF4-FFF2-40B4-BE49-F238E27FC236}">
-                <a16:creationId xmlns:a16="http://schemas.microsoft.com/office/drawing/2014/main" id="{25BEF8FE-09F5-4BDF-9D11-16B06BE254C0}"/>
-              </a:ext>
-            </a:extLst>
-          </p:cNvPr>
+          <p:cNvPr id="4" name="Marcador de pie de página 3"/>
           <p:cNvSpPr>
             <a:spLocks noGrp="1"/>
           </p:cNvSpPr>
@@ -253,13 +234,7 @@
       </p:sp>
       <p:sp>
         <p:nvSpPr>
-          <p:cNvPr id="5" name="Marcador de número de diapositiva 4">
-            <a:extLst>
-              <a:ext uri="{FF2B5EF4-FFF2-40B4-BE49-F238E27FC236}">
-                <a16:creationId xmlns:a16="http://schemas.microsoft.com/office/drawing/2014/main" id="{E1B121BA-3DB2-40B9-B001-25FF4F6C13BD}"/>
-              </a:ext>
-            </a:extLst>
-          </p:cNvPr>
+          <p:cNvPr id="5" name="Marcador de número de diapositiva 4"/>
           <p:cNvSpPr>
             <a:spLocks noGrp="1"/>
           </p:cNvSpPr>
@@ -286,18 +261,12 @@
           <a:p>
             <a:fld id="{85F869EF-9544-49D2-B6E5-CEA1885D3623}" type="slidenum">
               <a:rPr lang="es-BO" smtClean="0"/>
-              <a:t>‹Nº›</a:t>
             </a:fld>
             <a:endParaRPr lang="es-BO"/>
           </a:p>
         </p:txBody>
       </p:sp>
     </p:spTree>
-    <p:extLst>
-      <p:ext uri="{BB962C8B-B14F-4D97-AF65-F5344CB8AC3E}">
-        <p14:creationId xmlns:p14="http://schemas.microsoft.com/office/powerpoint/2010/main" val="2408126250"/>
-      </p:ext>
-    </p:extLst>
   </p:cSld>
   <p:clrMap bg1="lt1" tx1="dk1" bg2="lt2" tx2="dk2" accent1="accent1" accent2="accent2" accent3="accent3" accent4="accent4" accent5="accent5" accent6="accent6" hlink="hlink" folHlink="folHlink"/>
 </p:handoutMaster>
@@ -322,13 +291,7 @@
       </p:grpSpPr>
       <p:sp>
         <p:nvSpPr>
-          <p:cNvPr id="2" name="Título 1">
-            <a:extLst>
-              <a:ext uri="{FF2B5EF4-FFF2-40B4-BE49-F238E27FC236}">
-                <a16:creationId xmlns:a16="http://schemas.microsoft.com/office/drawing/2014/main" id="{89650DFA-26E6-4F79-AD75-2AC7109F7DCB}"/>
-              </a:ext>
-            </a:extLst>
-          </p:cNvPr>
+          <p:cNvPr id="2" name="Título 1"/>
           <p:cNvSpPr>
             <a:spLocks noGrp="1"/>
           </p:cNvSpPr>
@@ -360,18 +323,12 @@
       </p:sp>
       <p:sp>
         <p:nvSpPr>
-          <p:cNvPr id="3" name="Subtítulo 2">
-            <a:extLst>
-              <a:ext uri="{FF2B5EF4-FFF2-40B4-BE49-F238E27FC236}">
-                <a16:creationId xmlns:a16="http://schemas.microsoft.com/office/drawing/2014/main" id="{93CF6DC9-B4DB-42F1-9E84-A7CAAD15D129}"/>
-              </a:ext>
-            </a:extLst>
-          </p:cNvPr>
-          <p:cNvSpPr>
-            <a:spLocks noGrp="1"/>
-          </p:cNvSpPr>
-          <p:nvPr>
-            <p:ph type="subTitle" idx="1"/>
+          <p:cNvPr id="3" name="Subtítulo 2"/>
+          <p:cNvSpPr>
+            <a:spLocks noGrp="1"/>
+          </p:cNvSpPr>
+          <p:nvPr>
+            <p:ph type="subTitle" idx="1" hasCustomPrompt="1"/>
           </p:nvPr>
         </p:nvSpPr>
         <p:spPr>
@@ -431,13 +388,7 @@
       </p:sp>
       <p:sp>
         <p:nvSpPr>
-          <p:cNvPr id="4" name="Marcador de fecha 3">
-            <a:extLst>
-              <a:ext uri="{FF2B5EF4-FFF2-40B4-BE49-F238E27FC236}">
-                <a16:creationId xmlns:a16="http://schemas.microsoft.com/office/drawing/2014/main" id="{20C54DBE-63BF-444E-B64F-F3C30C2585C3}"/>
-              </a:ext>
-            </a:extLst>
-          </p:cNvPr>
+          <p:cNvPr id="4" name="Marcador de fecha 3"/>
           <p:cNvSpPr>
             <a:spLocks noGrp="1"/>
           </p:cNvSpPr>
@@ -452,7 +403,6 @@
           <a:p>
             <a:fld id="{A630C2E1-33D6-40E1-80A6-0C7BC2346BD4}" type="datetimeFigureOut">
               <a:rPr lang="es-BO" smtClean="0"/>
-              <a:t>1/6/2026</a:t>
             </a:fld>
             <a:endParaRPr lang="es-BO"/>
           </a:p>
@@ -460,13 +410,7 @@
       </p:sp>
       <p:sp>
         <p:nvSpPr>
-          <p:cNvPr id="5" name="Marcador de pie de página 4">
-            <a:extLst>
-              <a:ext uri="{FF2B5EF4-FFF2-40B4-BE49-F238E27FC236}">
-                <a16:creationId xmlns:a16="http://schemas.microsoft.com/office/drawing/2014/main" id="{B9395997-8786-47A6-A6FF-7012934E32DC}"/>
-              </a:ext>
-            </a:extLst>
-          </p:cNvPr>
+          <p:cNvPr id="5" name="Marcador de pie de página 4"/>
           <p:cNvSpPr>
             <a:spLocks noGrp="1"/>
           </p:cNvSpPr>
@@ -485,13 +429,7 @@
       </p:sp>
       <p:sp>
         <p:nvSpPr>
-          <p:cNvPr id="6" name="Marcador de número de diapositiva 5">
-            <a:extLst>
-              <a:ext uri="{FF2B5EF4-FFF2-40B4-BE49-F238E27FC236}">
-                <a16:creationId xmlns:a16="http://schemas.microsoft.com/office/drawing/2014/main" id="{459ECC9E-A67C-47F7-9ADD-7FFDE7CCDC02}"/>
-              </a:ext>
-            </a:extLst>
-          </p:cNvPr>
+          <p:cNvPr id="6" name="Marcador de número de diapositiva 5"/>
           <p:cNvSpPr>
             <a:spLocks noGrp="1"/>
           </p:cNvSpPr>
@@ -506,18 +444,12 @@
           <a:p>
             <a:fld id="{54302F1C-750C-4CC0-BD62-0C064DD2F842}" type="slidenum">
               <a:rPr lang="es-BO" smtClean="0"/>
-              <a:t>‹Nº›</a:t>
             </a:fld>
             <a:endParaRPr lang="es-BO"/>
           </a:p>
         </p:txBody>
       </p:sp>
     </p:spTree>
-    <p:extLst>
-      <p:ext uri="{BB962C8B-B14F-4D97-AF65-F5344CB8AC3E}">
-        <p14:creationId xmlns:p14="http://schemas.microsoft.com/office/powerpoint/2010/main" val="2555601259"/>
-      </p:ext>
-    </p:extLst>
   </p:cSld>
   <p:clrMapOvr>
     <a:masterClrMapping/>
@@ -544,13 +476,7 @@
       </p:grpSpPr>
       <p:sp>
         <p:nvSpPr>
-          <p:cNvPr id="2" name="Título 1">
-            <a:extLst>
-              <a:ext uri="{FF2B5EF4-FFF2-40B4-BE49-F238E27FC236}">
-                <a16:creationId xmlns:a16="http://schemas.microsoft.com/office/drawing/2014/main" id="{626644C2-54B2-40B3-B155-729CF97E6B4F}"/>
-              </a:ext>
-            </a:extLst>
-          </p:cNvPr>
+          <p:cNvPr id="2" name="Título 1"/>
           <p:cNvSpPr>
             <a:spLocks noGrp="1"/>
           </p:cNvSpPr>
@@ -573,18 +499,12 @@
       </p:sp>
       <p:sp>
         <p:nvSpPr>
-          <p:cNvPr id="3" name="Marcador de texto vertical 2">
-            <a:extLst>
-              <a:ext uri="{FF2B5EF4-FFF2-40B4-BE49-F238E27FC236}">
-                <a16:creationId xmlns:a16="http://schemas.microsoft.com/office/drawing/2014/main" id="{4512D2AA-E3EA-46AF-942C-68266D545D45}"/>
-              </a:ext>
-            </a:extLst>
-          </p:cNvPr>
-          <p:cNvSpPr>
-            <a:spLocks noGrp="1"/>
-          </p:cNvSpPr>
-          <p:nvPr>
-            <p:ph type="body" orient="vert" idx="1"/>
+          <p:cNvPr id="3" name="Marcador de texto vertical 2"/>
+          <p:cNvSpPr>
+            <a:spLocks noGrp="1"/>
+          </p:cNvSpPr>
+          <p:nvPr>
+            <p:ph type="body" orient="vert" idx="1" hasCustomPrompt="1"/>
           </p:nvPr>
         </p:nvSpPr>
         <p:spPr/>
@@ -597,6 +517,7 @@
               <a:rPr lang="es-ES"/>
               <a:t>Haga clic para modificar los estilos de texto del patrón</a:t>
             </a:r>
+            <a:endParaRPr lang="es-ES"/>
           </a:p>
           <a:p>
             <a:pPr lvl="1"/>
@@ -604,6 +525,7 @@
               <a:rPr lang="es-ES"/>
               <a:t>Segundo nivel</a:t>
             </a:r>
+            <a:endParaRPr lang="es-ES"/>
           </a:p>
           <a:p>
             <a:pPr lvl="2"/>
@@ -611,6 +533,7 @@
               <a:rPr lang="es-ES"/>
               <a:t>Tercer nivel</a:t>
             </a:r>
+            <a:endParaRPr lang="es-ES"/>
           </a:p>
           <a:p>
             <a:pPr lvl="3"/>
@@ -618,6 +541,7 @@
               <a:rPr lang="es-ES"/>
               <a:t>Cuarto nivel</a:t>
             </a:r>
+            <a:endParaRPr lang="es-ES"/>
           </a:p>
           <a:p>
             <a:pPr lvl="4"/>
@@ -631,13 +555,7 @@
       </p:sp>
       <p:sp>
         <p:nvSpPr>
-          <p:cNvPr id="4" name="Marcador de fecha 3">
-            <a:extLst>
-              <a:ext uri="{FF2B5EF4-FFF2-40B4-BE49-F238E27FC236}">
-                <a16:creationId xmlns:a16="http://schemas.microsoft.com/office/drawing/2014/main" id="{FD5F7FDD-B4E5-48A6-AEAD-90C8F564C1FC}"/>
-              </a:ext>
-            </a:extLst>
-          </p:cNvPr>
+          <p:cNvPr id="4" name="Marcador de fecha 3"/>
           <p:cNvSpPr>
             <a:spLocks noGrp="1"/>
           </p:cNvSpPr>
@@ -652,7 +570,6 @@
           <a:p>
             <a:fld id="{A630C2E1-33D6-40E1-80A6-0C7BC2346BD4}" type="datetimeFigureOut">
               <a:rPr lang="es-BO" smtClean="0"/>
-              <a:t>1/6/2026</a:t>
             </a:fld>
             <a:endParaRPr lang="es-BO"/>
           </a:p>
@@ -660,13 +577,7 @@
       </p:sp>
       <p:sp>
         <p:nvSpPr>
-          <p:cNvPr id="5" name="Marcador de pie de página 4">
-            <a:extLst>
-              <a:ext uri="{FF2B5EF4-FFF2-40B4-BE49-F238E27FC236}">
-                <a16:creationId xmlns:a16="http://schemas.microsoft.com/office/drawing/2014/main" id="{BEF325B3-4569-44E4-AA0C-877F429D2AA9}"/>
-              </a:ext>
-            </a:extLst>
-          </p:cNvPr>
+          <p:cNvPr id="5" name="Marcador de pie de página 4"/>
           <p:cNvSpPr>
             <a:spLocks noGrp="1"/>
           </p:cNvSpPr>
@@ -685,13 +596,7 @@
       </p:sp>
       <p:sp>
         <p:nvSpPr>
-          <p:cNvPr id="6" name="Marcador de número de diapositiva 5">
-            <a:extLst>
-              <a:ext uri="{FF2B5EF4-FFF2-40B4-BE49-F238E27FC236}">
-                <a16:creationId xmlns:a16="http://schemas.microsoft.com/office/drawing/2014/main" id="{58224DED-C70E-452C-97F0-C9D535539C76}"/>
-              </a:ext>
-            </a:extLst>
-          </p:cNvPr>
+          <p:cNvPr id="6" name="Marcador de número de diapositiva 5"/>
           <p:cNvSpPr>
             <a:spLocks noGrp="1"/>
           </p:cNvSpPr>
@@ -706,18 +611,12 @@
           <a:p>
             <a:fld id="{54302F1C-750C-4CC0-BD62-0C064DD2F842}" type="slidenum">
               <a:rPr lang="es-BO" smtClean="0"/>
-              <a:t>‹Nº›</a:t>
             </a:fld>
             <a:endParaRPr lang="es-BO"/>
           </a:p>
         </p:txBody>
       </p:sp>
     </p:spTree>
-    <p:extLst>
-      <p:ext uri="{BB962C8B-B14F-4D97-AF65-F5344CB8AC3E}">
-        <p14:creationId xmlns:p14="http://schemas.microsoft.com/office/powerpoint/2010/main" val="786046059"/>
-      </p:ext>
-    </p:extLst>
   </p:cSld>
   <p:clrMapOvr>
     <a:masterClrMapping/>
@@ -744,13 +643,7 @@
       </p:grpSpPr>
       <p:sp>
         <p:nvSpPr>
-          <p:cNvPr id="2" name="Título vertical 1">
-            <a:extLst>
-              <a:ext uri="{FF2B5EF4-FFF2-40B4-BE49-F238E27FC236}">
-                <a16:creationId xmlns:a16="http://schemas.microsoft.com/office/drawing/2014/main" id="{F8C80477-F107-484C-8B10-6A2A4AD44E18}"/>
-              </a:ext>
-            </a:extLst>
-          </p:cNvPr>
+          <p:cNvPr id="2" name="Título vertical 1"/>
           <p:cNvSpPr>
             <a:spLocks noGrp="1"/>
           </p:cNvSpPr>
@@ -778,18 +671,12 @@
       </p:sp>
       <p:sp>
         <p:nvSpPr>
-          <p:cNvPr id="3" name="Marcador de texto vertical 2">
-            <a:extLst>
-              <a:ext uri="{FF2B5EF4-FFF2-40B4-BE49-F238E27FC236}">
-                <a16:creationId xmlns:a16="http://schemas.microsoft.com/office/drawing/2014/main" id="{6E679A2B-70E0-41FE-8377-275A271AA8E2}"/>
-              </a:ext>
-            </a:extLst>
-          </p:cNvPr>
-          <p:cNvSpPr>
-            <a:spLocks noGrp="1"/>
-          </p:cNvSpPr>
-          <p:nvPr>
-            <p:ph type="body" orient="vert" idx="1"/>
+          <p:cNvPr id="3" name="Marcador de texto vertical 2"/>
+          <p:cNvSpPr>
+            <a:spLocks noGrp="1"/>
+          </p:cNvSpPr>
+          <p:nvPr>
+            <p:ph type="body" orient="vert" idx="1" hasCustomPrompt="1"/>
           </p:nvPr>
         </p:nvSpPr>
         <p:spPr>
@@ -807,6 +694,7 @@
               <a:rPr lang="es-ES"/>
               <a:t>Haga clic para modificar los estilos de texto del patrón</a:t>
             </a:r>
+            <a:endParaRPr lang="es-ES"/>
           </a:p>
           <a:p>
             <a:pPr lvl="1"/>
@@ -814,6 +702,7 @@
               <a:rPr lang="es-ES"/>
               <a:t>Segundo nivel</a:t>
             </a:r>
+            <a:endParaRPr lang="es-ES"/>
           </a:p>
           <a:p>
             <a:pPr lvl="2"/>
@@ -821,6 +710,7 @@
               <a:rPr lang="es-ES"/>
               <a:t>Tercer nivel</a:t>
             </a:r>
+            <a:endParaRPr lang="es-ES"/>
           </a:p>
           <a:p>
             <a:pPr lvl="3"/>
@@ -828,6 +718,7 @@
               <a:rPr lang="es-ES"/>
               <a:t>Cuarto nivel</a:t>
             </a:r>
+            <a:endParaRPr lang="es-ES"/>
           </a:p>
           <a:p>
             <a:pPr lvl="4"/>
@@ -841,13 +732,7 @@
       </p:sp>
       <p:sp>
         <p:nvSpPr>
-          <p:cNvPr id="4" name="Marcador de fecha 3">
-            <a:extLst>
-              <a:ext uri="{FF2B5EF4-FFF2-40B4-BE49-F238E27FC236}">
-                <a16:creationId xmlns:a16="http://schemas.microsoft.com/office/drawing/2014/main" id="{6F126554-B7C4-454E-9998-63A84C48DAC7}"/>
-              </a:ext>
-            </a:extLst>
-          </p:cNvPr>
+          <p:cNvPr id="4" name="Marcador de fecha 3"/>
           <p:cNvSpPr>
             <a:spLocks noGrp="1"/>
           </p:cNvSpPr>
@@ -862,7 +747,6 @@
           <a:p>
             <a:fld id="{A630C2E1-33D6-40E1-80A6-0C7BC2346BD4}" type="datetimeFigureOut">
               <a:rPr lang="es-BO" smtClean="0"/>
-              <a:t>1/6/2026</a:t>
             </a:fld>
             <a:endParaRPr lang="es-BO"/>
           </a:p>
@@ -870,13 +754,7 @@
       </p:sp>
       <p:sp>
         <p:nvSpPr>
-          <p:cNvPr id="5" name="Marcador de pie de página 4">
-            <a:extLst>
-              <a:ext uri="{FF2B5EF4-FFF2-40B4-BE49-F238E27FC236}">
-                <a16:creationId xmlns:a16="http://schemas.microsoft.com/office/drawing/2014/main" id="{6C716104-7106-48F1-8B68-EA4F8E785FB4}"/>
-              </a:ext>
-            </a:extLst>
-          </p:cNvPr>
+          <p:cNvPr id="5" name="Marcador de pie de página 4"/>
           <p:cNvSpPr>
             <a:spLocks noGrp="1"/>
           </p:cNvSpPr>
@@ -895,13 +773,7 @@
       </p:sp>
       <p:sp>
         <p:nvSpPr>
-          <p:cNvPr id="6" name="Marcador de número de diapositiva 5">
-            <a:extLst>
-              <a:ext uri="{FF2B5EF4-FFF2-40B4-BE49-F238E27FC236}">
-                <a16:creationId xmlns:a16="http://schemas.microsoft.com/office/drawing/2014/main" id="{D48BA1E8-4C9E-4305-B455-CDB2AE40A2D9}"/>
-              </a:ext>
-            </a:extLst>
-          </p:cNvPr>
+          <p:cNvPr id="6" name="Marcador de número de diapositiva 5"/>
           <p:cNvSpPr>
             <a:spLocks noGrp="1"/>
           </p:cNvSpPr>
@@ -916,18 +788,12 @@
           <a:p>
             <a:fld id="{54302F1C-750C-4CC0-BD62-0C064DD2F842}" type="slidenum">
               <a:rPr lang="es-BO" smtClean="0"/>
-              <a:t>‹Nº›</a:t>
             </a:fld>
             <a:endParaRPr lang="es-BO"/>
           </a:p>
         </p:txBody>
       </p:sp>
     </p:spTree>
-    <p:extLst>
-      <p:ext uri="{BB962C8B-B14F-4D97-AF65-F5344CB8AC3E}">
-        <p14:creationId xmlns:p14="http://schemas.microsoft.com/office/powerpoint/2010/main" val="3160178611"/>
-      </p:ext>
-    </p:extLst>
   </p:cSld>
   <p:clrMapOvr>
     <a:masterClrMapping/>
@@ -954,13 +820,7 @@
       </p:grpSpPr>
       <p:sp>
         <p:nvSpPr>
-          <p:cNvPr id="2" name="Título 1">
-            <a:extLst>
-              <a:ext uri="{FF2B5EF4-FFF2-40B4-BE49-F238E27FC236}">
-                <a16:creationId xmlns:a16="http://schemas.microsoft.com/office/drawing/2014/main" id="{4B676A72-ABC4-45D8-BC98-7AAFD271544F}"/>
-              </a:ext>
-            </a:extLst>
-          </p:cNvPr>
+          <p:cNvPr id="2" name="Título 1"/>
           <p:cNvSpPr>
             <a:spLocks noGrp="1"/>
           </p:cNvSpPr>
@@ -983,18 +843,12 @@
       </p:sp>
       <p:sp>
         <p:nvSpPr>
-          <p:cNvPr id="3" name="Marcador de contenido 2">
-            <a:extLst>
-              <a:ext uri="{FF2B5EF4-FFF2-40B4-BE49-F238E27FC236}">
-                <a16:creationId xmlns:a16="http://schemas.microsoft.com/office/drawing/2014/main" id="{7E5F2DFC-4339-468E-98E0-0AB794FAADBF}"/>
-              </a:ext>
-            </a:extLst>
-          </p:cNvPr>
-          <p:cNvSpPr>
-            <a:spLocks noGrp="1"/>
-          </p:cNvSpPr>
-          <p:nvPr>
-            <p:ph idx="1"/>
+          <p:cNvPr id="3" name="Marcador de contenido 2"/>
+          <p:cNvSpPr>
+            <a:spLocks noGrp="1"/>
+          </p:cNvSpPr>
+          <p:nvPr>
+            <p:ph idx="1" hasCustomPrompt="1"/>
           </p:nvPr>
         </p:nvSpPr>
         <p:spPr/>
@@ -1007,6 +861,7 @@
               <a:rPr lang="es-ES"/>
               <a:t>Haga clic para modificar los estilos de texto del patrón</a:t>
             </a:r>
+            <a:endParaRPr lang="es-ES"/>
           </a:p>
           <a:p>
             <a:pPr lvl="1"/>
@@ -1014,6 +869,7 @@
               <a:rPr lang="es-ES"/>
               <a:t>Segundo nivel</a:t>
             </a:r>
+            <a:endParaRPr lang="es-ES"/>
           </a:p>
           <a:p>
             <a:pPr lvl="2"/>
@@ -1021,6 +877,7 @@
               <a:rPr lang="es-ES"/>
               <a:t>Tercer nivel</a:t>
             </a:r>
+            <a:endParaRPr lang="es-ES"/>
           </a:p>
           <a:p>
             <a:pPr lvl="3"/>
@@ -1028,6 +885,7 @@
               <a:rPr lang="es-ES"/>
               <a:t>Cuarto nivel</a:t>
             </a:r>
+            <a:endParaRPr lang="es-ES"/>
           </a:p>
           <a:p>
             <a:pPr lvl="4"/>
@@ -1041,13 +899,7 @@
       </p:sp>
       <p:sp>
         <p:nvSpPr>
-          <p:cNvPr id="4" name="Marcador de fecha 3">
-            <a:extLst>
-              <a:ext uri="{FF2B5EF4-FFF2-40B4-BE49-F238E27FC236}">
-                <a16:creationId xmlns:a16="http://schemas.microsoft.com/office/drawing/2014/main" id="{259F049B-7DDB-4A68-B54A-0C3A7482F940}"/>
-              </a:ext>
-            </a:extLst>
-          </p:cNvPr>
+          <p:cNvPr id="4" name="Marcador de fecha 3"/>
           <p:cNvSpPr>
             <a:spLocks noGrp="1"/>
           </p:cNvSpPr>
@@ -1062,7 +914,6 @@
           <a:p>
             <a:fld id="{A630C2E1-33D6-40E1-80A6-0C7BC2346BD4}" type="datetimeFigureOut">
               <a:rPr lang="es-BO" smtClean="0"/>
-              <a:t>1/6/2026</a:t>
             </a:fld>
             <a:endParaRPr lang="es-BO"/>
           </a:p>
@@ -1070,13 +921,7 @@
       </p:sp>
       <p:sp>
         <p:nvSpPr>
-          <p:cNvPr id="5" name="Marcador de pie de página 4">
-            <a:extLst>
-              <a:ext uri="{FF2B5EF4-FFF2-40B4-BE49-F238E27FC236}">
-                <a16:creationId xmlns:a16="http://schemas.microsoft.com/office/drawing/2014/main" id="{B153837D-BE4B-4545-99ED-D74557A143C4}"/>
-              </a:ext>
-            </a:extLst>
-          </p:cNvPr>
+          <p:cNvPr id="5" name="Marcador de pie de página 4"/>
           <p:cNvSpPr>
             <a:spLocks noGrp="1"/>
           </p:cNvSpPr>
@@ -1095,13 +940,7 @@
       </p:sp>
       <p:sp>
         <p:nvSpPr>
-          <p:cNvPr id="6" name="Marcador de número de diapositiva 5">
-            <a:extLst>
-              <a:ext uri="{FF2B5EF4-FFF2-40B4-BE49-F238E27FC236}">
-                <a16:creationId xmlns:a16="http://schemas.microsoft.com/office/drawing/2014/main" id="{15C510FE-E83A-4816-8A4A-D5D0D06E704C}"/>
-              </a:ext>
-            </a:extLst>
-          </p:cNvPr>
+          <p:cNvPr id="6" name="Marcador de número de diapositiva 5"/>
           <p:cNvSpPr>
             <a:spLocks noGrp="1"/>
           </p:cNvSpPr>
@@ -1116,18 +955,12 @@
           <a:p>
             <a:fld id="{54302F1C-750C-4CC0-BD62-0C064DD2F842}" type="slidenum">
               <a:rPr lang="es-BO" smtClean="0"/>
-              <a:t>‹Nº›</a:t>
             </a:fld>
             <a:endParaRPr lang="es-BO"/>
           </a:p>
         </p:txBody>
       </p:sp>
     </p:spTree>
-    <p:extLst>
-      <p:ext uri="{BB962C8B-B14F-4D97-AF65-F5344CB8AC3E}">
-        <p14:creationId xmlns:p14="http://schemas.microsoft.com/office/powerpoint/2010/main" val="4021288637"/>
-      </p:ext>
-    </p:extLst>
   </p:cSld>
   <p:clrMapOvr>
     <a:masterClrMapping/>
@@ -1154,13 +987,7 @@
       </p:grpSpPr>
       <p:sp>
         <p:nvSpPr>
-          <p:cNvPr id="2" name="Título 1">
-            <a:extLst>
-              <a:ext uri="{FF2B5EF4-FFF2-40B4-BE49-F238E27FC236}">
-                <a16:creationId xmlns:a16="http://schemas.microsoft.com/office/drawing/2014/main" id="{FE27753D-F627-490C-94E7-6A3206CBD4CC}"/>
-              </a:ext>
-            </a:extLst>
-          </p:cNvPr>
+          <p:cNvPr id="2" name="Título 1"/>
           <p:cNvSpPr>
             <a:spLocks noGrp="1"/>
           </p:cNvSpPr>
@@ -1192,18 +1019,12 @@
       </p:sp>
       <p:sp>
         <p:nvSpPr>
-          <p:cNvPr id="3" name="Marcador de texto 2">
-            <a:extLst>
-              <a:ext uri="{FF2B5EF4-FFF2-40B4-BE49-F238E27FC236}">
-                <a16:creationId xmlns:a16="http://schemas.microsoft.com/office/drawing/2014/main" id="{FA8A9BAA-16FD-458F-AADC-7931042B406A}"/>
-              </a:ext>
-            </a:extLst>
-          </p:cNvPr>
-          <p:cNvSpPr>
-            <a:spLocks noGrp="1"/>
-          </p:cNvSpPr>
-          <p:nvPr>
-            <p:ph type="body" idx="1"/>
+          <p:cNvPr id="3" name="Marcador de texto 2"/>
+          <p:cNvSpPr>
+            <a:spLocks noGrp="1"/>
+          </p:cNvSpPr>
+          <p:nvPr>
+            <p:ph type="body" idx="1" hasCustomPrompt="1"/>
           </p:nvPr>
         </p:nvSpPr>
         <p:spPr>
@@ -1312,18 +1133,13 @@
               <a:rPr lang="es-ES"/>
               <a:t>Haga clic para modificar los estilos de texto del patrón</a:t>
             </a:r>
-          </a:p>
-        </p:txBody>
-      </p:sp>
-      <p:sp>
-        <p:nvSpPr>
-          <p:cNvPr id="4" name="Marcador de fecha 3">
-            <a:extLst>
-              <a:ext uri="{FF2B5EF4-FFF2-40B4-BE49-F238E27FC236}">
-                <a16:creationId xmlns:a16="http://schemas.microsoft.com/office/drawing/2014/main" id="{F2028B72-DFA7-4F42-83CC-7FE8CC4A1537}"/>
-              </a:ext>
-            </a:extLst>
-          </p:cNvPr>
+            <a:endParaRPr lang="es-ES"/>
+          </a:p>
+        </p:txBody>
+      </p:sp>
+      <p:sp>
+        <p:nvSpPr>
+          <p:cNvPr id="4" name="Marcador de fecha 3"/>
           <p:cNvSpPr>
             <a:spLocks noGrp="1"/>
           </p:cNvSpPr>
@@ -1338,7 +1154,6 @@
           <a:p>
             <a:fld id="{A630C2E1-33D6-40E1-80A6-0C7BC2346BD4}" type="datetimeFigureOut">
               <a:rPr lang="es-BO" smtClean="0"/>
-              <a:t>1/6/2026</a:t>
             </a:fld>
             <a:endParaRPr lang="es-BO"/>
           </a:p>
@@ -1346,13 +1161,7 @@
       </p:sp>
       <p:sp>
         <p:nvSpPr>
-          <p:cNvPr id="5" name="Marcador de pie de página 4">
-            <a:extLst>
-              <a:ext uri="{FF2B5EF4-FFF2-40B4-BE49-F238E27FC236}">
-                <a16:creationId xmlns:a16="http://schemas.microsoft.com/office/drawing/2014/main" id="{3CAA97E0-C129-4317-9BE5-19E45D717855}"/>
-              </a:ext>
-            </a:extLst>
-          </p:cNvPr>
+          <p:cNvPr id="5" name="Marcador de pie de página 4"/>
           <p:cNvSpPr>
             <a:spLocks noGrp="1"/>
           </p:cNvSpPr>
@@ -1371,13 +1180,7 @@
       </p:sp>
       <p:sp>
         <p:nvSpPr>
-          <p:cNvPr id="6" name="Marcador de número de diapositiva 5">
-            <a:extLst>
-              <a:ext uri="{FF2B5EF4-FFF2-40B4-BE49-F238E27FC236}">
-                <a16:creationId xmlns:a16="http://schemas.microsoft.com/office/drawing/2014/main" id="{13B210B5-DB8D-45E9-A6CA-7E9C68AD2A03}"/>
-              </a:ext>
-            </a:extLst>
-          </p:cNvPr>
+          <p:cNvPr id="6" name="Marcador de número de diapositiva 5"/>
           <p:cNvSpPr>
             <a:spLocks noGrp="1"/>
           </p:cNvSpPr>
@@ -1392,18 +1195,12 @@
           <a:p>
             <a:fld id="{54302F1C-750C-4CC0-BD62-0C064DD2F842}" type="slidenum">
               <a:rPr lang="es-BO" smtClean="0"/>
-              <a:t>‹Nº›</a:t>
             </a:fld>
             <a:endParaRPr lang="es-BO"/>
           </a:p>
         </p:txBody>
       </p:sp>
     </p:spTree>
-    <p:extLst>
-      <p:ext uri="{BB962C8B-B14F-4D97-AF65-F5344CB8AC3E}">
-        <p14:creationId xmlns:p14="http://schemas.microsoft.com/office/powerpoint/2010/main" val="3517870145"/>
-      </p:ext>
-    </p:extLst>
   </p:cSld>
   <p:clrMapOvr>
     <a:masterClrMapping/>
@@ -1430,13 +1227,7 @@
       </p:grpSpPr>
       <p:sp>
         <p:nvSpPr>
-          <p:cNvPr id="2" name="Título 1">
-            <a:extLst>
-              <a:ext uri="{FF2B5EF4-FFF2-40B4-BE49-F238E27FC236}">
-                <a16:creationId xmlns:a16="http://schemas.microsoft.com/office/drawing/2014/main" id="{5A051706-6D40-4A24-B38A-717912B217B6}"/>
-              </a:ext>
-            </a:extLst>
-          </p:cNvPr>
+          <p:cNvPr id="2" name="Título 1"/>
           <p:cNvSpPr>
             <a:spLocks noGrp="1"/>
           </p:cNvSpPr>
@@ -1459,18 +1250,12 @@
       </p:sp>
       <p:sp>
         <p:nvSpPr>
-          <p:cNvPr id="3" name="Marcador de contenido 2">
-            <a:extLst>
-              <a:ext uri="{FF2B5EF4-FFF2-40B4-BE49-F238E27FC236}">
-                <a16:creationId xmlns:a16="http://schemas.microsoft.com/office/drawing/2014/main" id="{BA3F6143-6632-48BF-BE20-629DD496C036}"/>
-              </a:ext>
-            </a:extLst>
-          </p:cNvPr>
-          <p:cNvSpPr>
-            <a:spLocks noGrp="1"/>
-          </p:cNvSpPr>
-          <p:nvPr>
-            <p:ph sz="half" idx="1"/>
+          <p:cNvPr id="3" name="Marcador de contenido 2"/>
+          <p:cNvSpPr>
+            <a:spLocks noGrp="1"/>
+          </p:cNvSpPr>
+          <p:nvPr>
+            <p:ph sz="half" idx="1" hasCustomPrompt="1"/>
           </p:nvPr>
         </p:nvSpPr>
         <p:spPr>
@@ -1488,6 +1273,7 @@
               <a:rPr lang="es-ES"/>
               <a:t>Haga clic para modificar los estilos de texto del patrón</a:t>
             </a:r>
+            <a:endParaRPr lang="es-ES"/>
           </a:p>
           <a:p>
             <a:pPr lvl="1"/>
@@ -1495,6 +1281,7 @@
               <a:rPr lang="es-ES"/>
               <a:t>Segundo nivel</a:t>
             </a:r>
+            <a:endParaRPr lang="es-ES"/>
           </a:p>
           <a:p>
             <a:pPr lvl="2"/>
@@ -1502,6 +1289,7 @@
               <a:rPr lang="es-ES"/>
               <a:t>Tercer nivel</a:t>
             </a:r>
+            <a:endParaRPr lang="es-ES"/>
           </a:p>
           <a:p>
             <a:pPr lvl="3"/>
@@ -1509,6 +1297,7 @@
               <a:rPr lang="es-ES"/>
               <a:t>Cuarto nivel</a:t>
             </a:r>
+            <a:endParaRPr lang="es-ES"/>
           </a:p>
           <a:p>
             <a:pPr lvl="4"/>
@@ -1522,18 +1311,12 @@
       </p:sp>
       <p:sp>
         <p:nvSpPr>
-          <p:cNvPr id="4" name="Marcador de contenido 3">
-            <a:extLst>
-              <a:ext uri="{FF2B5EF4-FFF2-40B4-BE49-F238E27FC236}">
-                <a16:creationId xmlns:a16="http://schemas.microsoft.com/office/drawing/2014/main" id="{6945366A-D314-4BAA-8BAF-8BA3CC8434CD}"/>
-              </a:ext>
-            </a:extLst>
-          </p:cNvPr>
-          <p:cNvSpPr>
-            <a:spLocks noGrp="1"/>
-          </p:cNvSpPr>
-          <p:nvPr>
-            <p:ph sz="half" idx="2"/>
+          <p:cNvPr id="4" name="Marcador de contenido 3"/>
+          <p:cNvSpPr>
+            <a:spLocks noGrp="1"/>
+          </p:cNvSpPr>
+          <p:nvPr>
+            <p:ph sz="half" idx="2" hasCustomPrompt="1"/>
           </p:nvPr>
         </p:nvSpPr>
         <p:spPr>
@@ -1551,6 +1334,7 @@
               <a:rPr lang="es-ES"/>
               <a:t>Haga clic para modificar los estilos de texto del patrón</a:t>
             </a:r>
+            <a:endParaRPr lang="es-ES"/>
           </a:p>
           <a:p>
             <a:pPr lvl="1"/>
@@ -1558,6 +1342,7 @@
               <a:rPr lang="es-ES"/>
               <a:t>Segundo nivel</a:t>
             </a:r>
+            <a:endParaRPr lang="es-ES"/>
           </a:p>
           <a:p>
             <a:pPr lvl="2"/>
@@ -1565,6 +1350,7 @@
               <a:rPr lang="es-ES"/>
               <a:t>Tercer nivel</a:t>
             </a:r>
+            <a:endParaRPr lang="es-ES"/>
           </a:p>
           <a:p>
             <a:pPr lvl="3"/>
@@ -1572,6 +1358,7 @@
               <a:rPr lang="es-ES"/>
               <a:t>Cuarto nivel</a:t>
             </a:r>
+            <a:endParaRPr lang="es-ES"/>
           </a:p>
           <a:p>
             <a:pPr lvl="4"/>
@@ -1585,13 +1372,7 @@
       </p:sp>
       <p:sp>
         <p:nvSpPr>
-          <p:cNvPr id="5" name="Marcador de fecha 4">
-            <a:extLst>
-              <a:ext uri="{FF2B5EF4-FFF2-40B4-BE49-F238E27FC236}">
-                <a16:creationId xmlns:a16="http://schemas.microsoft.com/office/drawing/2014/main" id="{562FF0D0-4849-45BA-A267-953E16F3C369}"/>
-              </a:ext>
-            </a:extLst>
-          </p:cNvPr>
+          <p:cNvPr id="5" name="Marcador de fecha 4"/>
           <p:cNvSpPr>
             <a:spLocks noGrp="1"/>
           </p:cNvSpPr>
@@ -1606,7 +1387,6 @@
           <a:p>
             <a:fld id="{A630C2E1-33D6-40E1-80A6-0C7BC2346BD4}" type="datetimeFigureOut">
               <a:rPr lang="es-BO" smtClean="0"/>
-              <a:t>1/6/2026</a:t>
             </a:fld>
             <a:endParaRPr lang="es-BO"/>
           </a:p>
@@ -1614,13 +1394,7 @@
       </p:sp>
       <p:sp>
         <p:nvSpPr>
-          <p:cNvPr id="6" name="Marcador de pie de página 5">
-            <a:extLst>
-              <a:ext uri="{FF2B5EF4-FFF2-40B4-BE49-F238E27FC236}">
-                <a16:creationId xmlns:a16="http://schemas.microsoft.com/office/drawing/2014/main" id="{7DE93560-4490-42DC-A4C8-B46849EA96CE}"/>
-              </a:ext>
-            </a:extLst>
-          </p:cNvPr>
+          <p:cNvPr id="6" name="Marcador de pie de página 5"/>
           <p:cNvSpPr>
             <a:spLocks noGrp="1"/>
           </p:cNvSpPr>
@@ -1639,13 +1413,7 @@
       </p:sp>
       <p:sp>
         <p:nvSpPr>
-          <p:cNvPr id="7" name="Marcador de número de diapositiva 6">
-            <a:extLst>
-              <a:ext uri="{FF2B5EF4-FFF2-40B4-BE49-F238E27FC236}">
-                <a16:creationId xmlns:a16="http://schemas.microsoft.com/office/drawing/2014/main" id="{F5C9B99E-C12D-4BEF-B48F-BEDC588D5033}"/>
-              </a:ext>
-            </a:extLst>
-          </p:cNvPr>
+          <p:cNvPr id="7" name="Marcador de número de diapositiva 6"/>
           <p:cNvSpPr>
             <a:spLocks noGrp="1"/>
           </p:cNvSpPr>
@@ -1660,18 +1428,12 @@
           <a:p>
             <a:fld id="{54302F1C-750C-4CC0-BD62-0C064DD2F842}" type="slidenum">
               <a:rPr lang="es-BO" smtClean="0"/>
-              <a:t>‹Nº›</a:t>
             </a:fld>
             <a:endParaRPr lang="es-BO"/>
           </a:p>
         </p:txBody>
       </p:sp>
     </p:spTree>
-    <p:extLst>
-      <p:ext uri="{BB962C8B-B14F-4D97-AF65-F5344CB8AC3E}">
-        <p14:creationId xmlns:p14="http://schemas.microsoft.com/office/powerpoint/2010/main" val="2122305210"/>
-      </p:ext>
-    </p:extLst>
   </p:cSld>
   <p:clrMapOvr>
     <a:masterClrMapping/>
@@ -1698,13 +1460,7 @@
       </p:grpSpPr>
       <p:sp>
         <p:nvSpPr>
-          <p:cNvPr id="2" name="Título 1">
-            <a:extLst>
-              <a:ext uri="{FF2B5EF4-FFF2-40B4-BE49-F238E27FC236}">
-                <a16:creationId xmlns:a16="http://schemas.microsoft.com/office/drawing/2014/main" id="{840706A3-E0C1-4F24-B919-717EE4956CC2}"/>
-              </a:ext>
-            </a:extLst>
-          </p:cNvPr>
+          <p:cNvPr id="2" name="Título 1"/>
           <p:cNvSpPr>
             <a:spLocks noGrp="1"/>
           </p:cNvSpPr>
@@ -1732,18 +1488,12 @@
       </p:sp>
       <p:sp>
         <p:nvSpPr>
-          <p:cNvPr id="3" name="Marcador de texto 2">
-            <a:extLst>
-              <a:ext uri="{FF2B5EF4-FFF2-40B4-BE49-F238E27FC236}">
-                <a16:creationId xmlns:a16="http://schemas.microsoft.com/office/drawing/2014/main" id="{6E9DC387-ABE9-4061-8E47-1EF1785FE301}"/>
-              </a:ext>
-            </a:extLst>
-          </p:cNvPr>
-          <p:cNvSpPr>
-            <a:spLocks noGrp="1"/>
-          </p:cNvSpPr>
-          <p:nvPr>
-            <p:ph type="body" idx="1"/>
+          <p:cNvPr id="3" name="Marcador de texto 2"/>
+          <p:cNvSpPr>
+            <a:spLocks noGrp="1"/>
+          </p:cNvSpPr>
+          <p:nvPr>
+            <p:ph type="body" idx="1" hasCustomPrompt="1"/>
           </p:nvPr>
         </p:nvSpPr>
         <p:spPr>
@@ -1798,23 +1548,18 @@
               <a:rPr lang="es-ES"/>
               <a:t>Haga clic para modificar los estilos de texto del patrón</a:t>
             </a:r>
-          </a:p>
-        </p:txBody>
-      </p:sp>
-      <p:sp>
-        <p:nvSpPr>
-          <p:cNvPr id="4" name="Marcador de contenido 3">
-            <a:extLst>
-              <a:ext uri="{FF2B5EF4-FFF2-40B4-BE49-F238E27FC236}">
-                <a16:creationId xmlns:a16="http://schemas.microsoft.com/office/drawing/2014/main" id="{1589BB15-C7A4-43F7-915C-5F586420E938}"/>
-              </a:ext>
-            </a:extLst>
-          </p:cNvPr>
-          <p:cNvSpPr>
-            <a:spLocks noGrp="1"/>
-          </p:cNvSpPr>
-          <p:nvPr>
-            <p:ph sz="half" idx="2"/>
+            <a:endParaRPr lang="es-ES"/>
+          </a:p>
+        </p:txBody>
+      </p:sp>
+      <p:sp>
+        <p:nvSpPr>
+          <p:cNvPr id="4" name="Marcador de contenido 3"/>
+          <p:cNvSpPr>
+            <a:spLocks noGrp="1"/>
+          </p:cNvSpPr>
+          <p:nvPr>
+            <p:ph sz="half" idx="2" hasCustomPrompt="1"/>
           </p:nvPr>
         </p:nvSpPr>
         <p:spPr>
@@ -1832,6 +1577,7 @@
               <a:rPr lang="es-ES"/>
               <a:t>Haga clic para modificar los estilos de texto del patrón</a:t>
             </a:r>
+            <a:endParaRPr lang="es-ES"/>
           </a:p>
           <a:p>
             <a:pPr lvl="1"/>
@@ -1839,6 +1585,7 @@
               <a:rPr lang="es-ES"/>
               <a:t>Segundo nivel</a:t>
             </a:r>
+            <a:endParaRPr lang="es-ES"/>
           </a:p>
           <a:p>
             <a:pPr lvl="2"/>
@@ -1846,6 +1593,7 @@
               <a:rPr lang="es-ES"/>
               <a:t>Tercer nivel</a:t>
             </a:r>
+            <a:endParaRPr lang="es-ES"/>
           </a:p>
           <a:p>
             <a:pPr lvl="3"/>
@@ -1853,6 +1601,7 @@
               <a:rPr lang="es-ES"/>
               <a:t>Cuarto nivel</a:t>
             </a:r>
+            <a:endParaRPr lang="es-ES"/>
           </a:p>
           <a:p>
             <a:pPr lvl="4"/>
@@ -1866,18 +1615,12 @@
       </p:sp>
       <p:sp>
         <p:nvSpPr>
-          <p:cNvPr id="5" name="Marcador de texto 4">
-            <a:extLst>
-              <a:ext uri="{FF2B5EF4-FFF2-40B4-BE49-F238E27FC236}">
-                <a16:creationId xmlns:a16="http://schemas.microsoft.com/office/drawing/2014/main" id="{69F487DC-3AC2-4C7D-AFCD-B44D4B8AF4E4}"/>
-              </a:ext>
-            </a:extLst>
-          </p:cNvPr>
-          <p:cNvSpPr>
-            <a:spLocks noGrp="1"/>
-          </p:cNvSpPr>
-          <p:nvPr>
-            <p:ph type="body" sz="quarter" idx="3"/>
+          <p:cNvPr id="5" name="Marcador de texto 4"/>
+          <p:cNvSpPr>
+            <a:spLocks noGrp="1"/>
+          </p:cNvSpPr>
+          <p:nvPr>
+            <p:ph type="body" sz="quarter" idx="3" hasCustomPrompt="1"/>
           </p:nvPr>
         </p:nvSpPr>
         <p:spPr>
@@ -1932,23 +1675,18 @@
               <a:rPr lang="es-ES"/>
               <a:t>Haga clic para modificar los estilos de texto del patrón</a:t>
             </a:r>
-          </a:p>
-        </p:txBody>
-      </p:sp>
-      <p:sp>
-        <p:nvSpPr>
-          <p:cNvPr id="6" name="Marcador de contenido 5">
-            <a:extLst>
-              <a:ext uri="{FF2B5EF4-FFF2-40B4-BE49-F238E27FC236}">
-                <a16:creationId xmlns:a16="http://schemas.microsoft.com/office/drawing/2014/main" id="{C0E94D21-4B5C-4DBA-BEF2-784790B7640D}"/>
-              </a:ext>
-            </a:extLst>
-          </p:cNvPr>
-          <p:cNvSpPr>
-            <a:spLocks noGrp="1"/>
-          </p:cNvSpPr>
-          <p:nvPr>
-            <p:ph sz="quarter" idx="4"/>
+            <a:endParaRPr lang="es-ES"/>
+          </a:p>
+        </p:txBody>
+      </p:sp>
+      <p:sp>
+        <p:nvSpPr>
+          <p:cNvPr id="6" name="Marcador de contenido 5"/>
+          <p:cNvSpPr>
+            <a:spLocks noGrp="1"/>
+          </p:cNvSpPr>
+          <p:nvPr>
+            <p:ph sz="quarter" idx="4" hasCustomPrompt="1"/>
           </p:nvPr>
         </p:nvSpPr>
         <p:spPr>
@@ -1966,6 +1704,7 @@
               <a:rPr lang="es-ES"/>
               <a:t>Haga clic para modificar los estilos de texto del patrón</a:t>
             </a:r>
+            <a:endParaRPr lang="es-ES"/>
           </a:p>
           <a:p>
             <a:pPr lvl="1"/>
@@ -1973,6 +1712,7 @@
               <a:rPr lang="es-ES"/>
               <a:t>Segundo nivel</a:t>
             </a:r>
+            <a:endParaRPr lang="es-ES"/>
           </a:p>
           <a:p>
             <a:pPr lvl="2"/>
@@ -1980,6 +1720,7 @@
               <a:rPr lang="es-ES"/>
               <a:t>Tercer nivel</a:t>
             </a:r>
+            <a:endParaRPr lang="es-ES"/>
           </a:p>
           <a:p>
             <a:pPr lvl="3"/>
@@ -1987,6 +1728,7 @@
               <a:rPr lang="es-ES"/>
               <a:t>Cuarto nivel</a:t>
             </a:r>
+            <a:endParaRPr lang="es-ES"/>
           </a:p>
           <a:p>
             <a:pPr lvl="4"/>
@@ -2000,13 +1742,7 @@
       </p:sp>
       <p:sp>
         <p:nvSpPr>
-          <p:cNvPr id="7" name="Marcador de fecha 6">
-            <a:extLst>
-              <a:ext uri="{FF2B5EF4-FFF2-40B4-BE49-F238E27FC236}">
-                <a16:creationId xmlns:a16="http://schemas.microsoft.com/office/drawing/2014/main" id="{DD4BB2E2-3A03-40B7-B41F-00A15E633442}"/>
-              </a:ext>
-            </a:extLst>
-          </p:cNvPr>
+          <p:cNvPr id="7" name="Marcador de fecha 6"/>
           <p:cNvSpPr>
             <a:spLocks noGrp="1"/>
           </p:cNvSpPr>
@@ -2021,7 +1757,6 @@
           <a:p>
             <a:fld id="{A630C2E1-33D6-40E1-80A6-0C7BC2346BD4}" type="datetimeFigureOut">
               <a:rPr lang="es-BO" smtClean="0"/>
-              <a:t>1/6/2026</a:t>
             </a:fld>
             <a:endParaRPr lang="es-BO"/>
           </a:p>
@@ -2029,13 +1764,7 @@
       </p:sp>
       <p:sp>
         <p:nvSpPr>
-          <p:cNvPr id="8" name="Marcador de pie de página 7">
-            <a:extLst>
-              <a:ext uri="{FF2B5EF4-FFF2-40B4-BE49-F238E27FC236}">
-                <a16:creationId xmlns:a16="http://schemas.microsoft.com/office/drawing/2014/main" id="{FA23A228-FF42-46D4-8216-996AE39469F9}"/>
-              </a:ext>
-            </a:extLst>
-          </p:cNvPr>
+          <p:cNvPr id="8" name="Marcador de pie de página 7"/>
           <p:cNvSpPr>
             <a:spLocks noGrp="1"/>
           </p:cNvSpPr>
@@ -2054,13 +1783,7 @@
       </p:sp>
       <p:sp>
         <p:nvSpPr>
-          <p:cNvPr id="9" name="Marcador de número de diapositiva 8">
-            <a:extLst>
-              <a:ext uri="{FF2B5EF4-FFF2-40B4-BE49-F238E27FC236}">
-                <a16:creationId xmlns:a16="http://schemas.microsoft.com/office/drawing/2014/main" id="{E21B2326-253F-405F-B3ED-FE717EFC2166}"/>
-              </a:ext>
-            </a:extLst>
-          </p:cNvPr>
+          <p:cNvPr id="9" name="Marcador de número de diapositiva 8"/>
           <p:cNvSpPr>
             <a:spLocks noGrp="1"/>
           </p:cNvSpPr>
@@ -2075,18 +1798,12 @@
           <a:p>
             <a:fld id="{54302F1C-750C-4CC0-BD62-0C064DD2F842}" type="slidenum">
               <a:rPr lang="es-BO" smtClean="0"/>
-              <a:t>‹Nº›</a:t>
             </a:fld>
             <a:endParaRPr lang="es-BO"/>
           </a:p>
         </p:txBody>
       </p:sp>
     </p:spTree>
-    <p:extLst>
-      <p:ext uri="{BB962C8B-B14F-4D97-AF65-F5344CB8AC3E}">
-        <p14:creationId xmlns:p14="http://schemas.microsoft.com/office/powerpoint/2010/main" val="992317595"/>
-      </p:ext>
-    </p:extLst>
   </p:cSld>
   <p:clrMapOvr>
     <a:masterClrMapping/>
@@ -2113,13 +1830,7 @@
       </p:grpSpPr>
       <p:sp>
         <p:nvSpPr>
-          <p:cNvPr id="2" name="Título 1">
-            <a:extLst>
-              <a:ext uri="{FF2B5EF4-FFF2-40B4-BE49-F238E27FC236}">
-                <a16:creationId xmlns:a16="http://schemas.microsoft.com/office/drawing/2014/main" id="{84968A57-99D1-490B-8DF5-A8D84A6010D3}"/>
-              </a:ext>
-            </a:extLst>
-          </p:cNvPr>
+          <p:cNvPr id="2" name="Título 1"/>
           <p:cNvSpPr>
             <a:spLocks noGrp="1"/>
           </p:cNvSpPr>
@@ -2142,13 +1853,7 @@
       </p:sp>
       <p:sp>
         <p:nvSpPr>
-          <p:cNvPr id="3" name="Marcador de fecha 2">
-            <a:extLst>
-              <a:ext uri="{FF2B5EF4-FFF2-40B4-BE49-F238E27FC236}">
-                <a16:creationId xmlns:a16="http://schemas.microsoft.com/office/drawing/2014/main" id="{30A2BAB6-1DAA-4181-B493-CADA3EE5A54A}"/>
-              </a:ext>
-            </a:extLst>
-          </p:cNvPr>
+          <p:cNvPr id="3" name="Marcador de fecha 2"/>
           <p:cNvSpPr>
             <a:spLocks noGrp="1"/>
           </p:cNvSpPr>
@@ -2163,7 +1868,6 @@
           <a:p>
             <a:fld id="{A630C2E1-33D6-40E1-80A6-0C7BC2346BD4}" type="datetimeFigureOut">
               <a:rPr lang="es-BO" smtClean="0"/>
-              <a:t>1/6/2026</a:t>
             </a:fld>
             <a:endParaRPr lang="es-BO"/>
           </a:p>
@@ -2171,13 +1875,7 @@
       </p:sp>
       <p:sp>
         <p:nvSpPr>
-          <p:cNvPr id="4" name="Marcador de pie de página 3">
-            <a:extLst>
-              <a:ext uri="{FF2B5EF4-FFF2-40B4-BE49-F238E27FC236}">
-                <a16:creationId xmlns:a16="http://schemas.microsoft.com/office/drawing/2014/main" id="{F76380F5-DD74-4DCE-BC94-C949369DE43F}"/>
-              </a:ext>
-            </a:extLst>
-          </p:cNvPr>
+          <p:cNvPr id="4" name="Marcador de pie de página 3"/>
           <p:cNvSpPr>
             <a:spLocks noGrp="1"/>
           </p:cNvSpPr>
@@ -2196,13 +1894,7 @@
       </p:sp>
       <p:sp>
         <p:nvSpPr>
-          <p:cNvPr id="5" name="Marcador de número de diapositiva 4">
-            <a:extLst>
-              <a:ext uri="{FF2B5EF4-FFF2-40B4-BE49-F238E27FC236}">
-                <a16:creationId xmlns:a16="http://schemas.microsoft.com/office/drawing/2014/main" id="{111CD45C-0B5B-4680-8504-B9466D10D4A9}"/>
-              </a:ext>
-            </a:extLst>
-          </p:cNvPr>
+          <p:cNvPr id="5" name="Marcador de número de diapositiva 4"/>
           <p:cNvSpPr>
             <a:spLocks noGrp="1"/>
           </p:cNvSpPr>
@@ -2217,18 +1909,12 @@
           <a:p>
             <a:fld id="{54302F1C-750C-4CC0-BD62-0C064DD2F842}" type="slidenum">
               <a:rPr lang="es-BO" smtClean="0"/>
-              <a:t>‹Nº›</a:t>
             </a:fld>
             <a:endParaRPr lang="es-BO"/>
           </a:p>
         </p:txBody>
       </p:sp>
     </p:spTree>
-    <p:extLst>
-      <p:ext uri="{BB962C8B-B14F-4D97-AF65-F5344CB8AC3E}">
-        <p14:creationId xmlns:p14="http://schemas.microsoft.com/office/powerpoint/2010/main" val="1461257510"/>
-      </p:ext>
-    </p:extLst>
   </p:cSld>
   <p:clrMapOvr>
     <a:masterClrMapping/>
@@ -2255,13 +1941,7 @@
       </p:grpSpPr>
       <p:sp>
         <p:nvSpPr>
-          <p:cNvPr id="2" name="Marcador de fecha 1">
-            <a:extLst>
-              <a:ext uri="{FF2B5EF4-FFF2-40B4-BE49-F238E27FC236}">
-                <a16:creationId xmlns:a16="http://schemas.microsoft.com/office/drawing/2014/main" id="{90D91A1A-16B7-4E96-8E51-CFDD00C91E8A}"/>
-              </a:ext>
-            </a:extLst>
-          </p:cNvPr>
+          <p:cNvPr id="2" name="Marcador de fecha 1"/>
           <p:cNvSpPr>
             <a:spLocks noGrp="1"/>
           </p:cNvSpPr>
@@ -2276,7 +1956,6 @@
           <a:p>
             <a:fld id="{A630C2E1-33D6-40E1-80A6-0C7BC2346BD4}" type="datetimeFigureOut">
               <a:rPr lang="es-BO" smtClean="0"/>
-              <a:t>1/6/2026</a:t>
             </a:fld>
             <a:endParaRPr lang="es-BO"/>
           </a:p>
@@ -2284,13 +1963,7 @@
       </p:sp>
       <p:sp>
         <p:nvSpPr>
-          <p:cNvPr id="3" name="Marcador de pie de página 2">
-            <a:extLst>
-              <a:ext uri="{FF2B5EF4-FFF2-40B4-BE49-F238E27FC236}">
-                <a16:creationId xmlns:a16="http://schemas.microsoft.com/office/drawing/2014/main" id="{2FD7514C-8746-4BE3-976D-3AD5170219A3}"/>
-              </a:ext>
-            </a:extLst>
-          </p:cNvPr>
+          <p:cNvPr id="3" name="Marcador de pie de página 2"/>
           <p:cNvSpPr>
             <a:spLocks noGrp="1"/>
           </p:cNvSpPr>
@@ -2309,13 +1982,7 @@
       </p:sp>
       <p:sp>
         <p:nvSpPr>
-          <p:cNvPr id="4" name="Marcador de número de diapositiva 3">
-            <a:extLst>
-              <a:ext uri="{FF2B5EF4-FFF2-40B4-BE49-F238E27FC236}">
-                <a16:creationId xmlns:a16="http://schemas.microsoft.com/office/drawing/2014/main" id="{1EE4CAA4-8D66-437D-B204-0E5C46B89B19}"/>
-              </a:ext>
-            </a:extLst>
-          </p:cNvPr>
+          <p:cNvPr id="4" name="Marcador de número de diapositiva 3"/>
           <p:cNvSpPr>
             <a:spLocks noGrp="1"/>
           </p:cNvSpPr>
@@ -2330,18 +1997,12 @@
           <a:p>
             <a:fld id="{54302F1C-750C-4CC0-BD62-0C064DD2F842}" type="slidenum">
               <a:rPr lang="es-BO" smtClean="0"/>
-              <a:t>‹Nº›</a:t>
             </a:fld>
             <a:endParaRPr lang="es-BO"/>
           </a:p>
         </p:txBody>
       </p:sp>
     </p:spTree>
-    <p:extLst>
-      <p:ext uri="{BB962C8B-B14F-4D97-AF65-F5344CB8AC3E}">
-        <p14:creationId xmlns:p14="http://schemas.microsoft.com/office/powerpoint/2010/main" val="100012892"/>
-      </p:ext>
-    </p:extLst>
   </p:cSld>
   <p:clrMapOvr>
     <a:masterClrMapping/>
@@ -2368,13 +2029,7 @@
       </p:grpSpPr>
       <p:sp>
         <p:nvSpPr>
-          <p:cNvPr id="2" name="Título 1">
-            <a:extLst>
-              <a:ext uri="{FF2B5EF4-FFF2-40B4-BE49-F238E27FC236}">
-                <a16:creationId xmlns:a16="http://schemas.microsoft.com/office/drawing/2014/main" id="{C8AAFF1D-D4A4-4151-B64F-937A92BBC0BD}"/>
-              </a:ext>
-            </a:extLst>
-          </p:cNvPr>
+          <p:cNvPr id="2" name="Título 1"/>
           <p:cNvSpPr>
             <a:spLocks noGrp="1"/>
           </p:cNvSpPr>
@@ -2406,18 +2061,12 @@
       </p:sp>
       <p:sp>
         <p:nvSpPr>
-          <p:cNvPr id="3" name="Marcador de contenido 2">
-            <a:extLst>
-              <a:ext uri="{FF2B5EF4-FFF2-40B4-BE49-F238E27FC236}">
-                <a16:creationId xmlns:a16="http://schemas.microsoft.com/office/drawing/2014/main" id="{C26B68E0-A23F-4E17-BF97-ED04F96BFC19}"/>
-              </a:ext>
-            </a:extLst>
-          </p:cNvPr>
-          <p:cNvSpPr>
-            <a:spLocks noGrp="1"/>
-          </p:cNvSpPr>
-          <p:nvPr>
-            <p:ph idx="1"/>
+          <p:cNvPr id="3" name="Marcador de contenido 2"/>
+          <p:cNvSpPr>
+            <a:spLocks noGrp="1"/>
+          </p:cNvSpPr>
+          <p:nvPr>
+            <p:ph idx="1" hasCustomPrompt="1"/>
           </p:nvPr>
         </p:nvSpPr>
         <p:spPr>
@@ -2463,6 +2112,7 @@
               <a:rPr lang="es-ES"/>
               <a:t>Haga clic para modificar los estilos de texto del patrón</a:t>
             </a:r>
+            <a:endParaRPr lang="es-ES"/>
           </a:p>
           <a:p>
             <a:pPr lvl="1"/>
@@ -2470,6 +2120,7 @@
               <a:rPr lang="es-ES"/>
               <a:t>Segundo nivel</a:t>
             </a:r>
+            <a:endParaRPr lang="es-ES"/>
           </a:p>
           <a:p>
             <a:pPr lvl="2"/>
@@ -2477,6 +2128,7 @@
               <a:rPr lang="es-ES"/>
               <a:t>Tercer nivel</a:t>
             </a:r>
+            <a:endParaRPr lang="es-ES"/>
           </a:p>
           <a:p>
             <a:pPr lvl="3"/>
@@ -2484,6 +2136,7 @@
               <a:rPr lang="es-ES"/>
               <a:t>Cuarto nivel</a:t>
             </a:r>
+            <a:endParaRPr lang="es-ES"/>
           </a:p>
           <a:p>
             <a:pPr lvl="4"/>
@@ -2497,18 +2150,12 @@
       </p:sp>
       <p:sp>
         <p:nvSpPr>
-          <p:cNvPr id="4" name="Marcador de texto 3">
-            <a:extLst>
-              <a:ext uri="{FF2B5EF4-FFF2-40B4-BE49-F238E27FC236}">
-                <a16:creationId xmlns:a16="http://schemas.microsoft.com/office/drawing/2014/main" id="{1C936FEA-7D96-4EAC-9644-177924FE936D}"/>
-              </a:ext>
-            </a:extLst>
-          </p:cNvPr>
-          <p:cNvSpPr>
-            <a:spLocks noGrp="1"/>
-          </p:cNvSpPr>
-          <p:nvPr>
-            <p:ph type="body" sz="half" idx="2"/>
+          <p:cNvPr id="4" name="Marcador de texto 3"/>
+          <p:cNvSpPr>
+            <a:spLocks noGrp="1"/>
+          </p:cNvSpPr>
+          <p:nvPr>
+            <p:ph type="body" sz="half" idx="2" hasCustomPrompt="1"/>
           </p:nvPr>
         </p:nvSpPr>
         <p:spPr>
@@ -2563,18 +2210,13 @@
               <a:rPr lang="es-ES"/>
               <a:t>Haga clic para modificar los estilos de texto del patrón</a:t>
             </a:r>
-          </a:p>
-        </p:txBody>
-      </p:sp>
-      <p:sp>
-        <p:nvSpPr>
-          <p:cNvPr id="5" name="Marcador de fecha 4">
-            <a:extLst>
-              <a:ext uri="{FF2B5EF4-FFF2-40B4-BE49-F238E27FC236}">
-                <a16:creationId xmlns:a16="http://schemas.microsoft.com/office/drawing/2014/main" id="{F3EB874F-6F87-4731-911E-BEA677F32038}"/>
-              </a:ext>
-            </a:extLst>
-          </p:cNvPr>
+            <a:endParaRPr lang="es-ES"/>
+          </a:p>
+        </p:txBody>
+      </p:sp>
+      <p:sp>
+        <p:nvSpPr>
+          <p:cNvPr id="5" name="Marcador de fecha 4"/>
           <p:cNvSpPr>
             <a:spLocks noGrp="1"/>
           </p:cNvSpPr>
@@ -2589,7 +2231,6 @@
           <a:p>
             <a:fld id="{A630C2E1-33D6-40E1-80A6-0C7BC2346BD4}" type="datetimeFigureOut">
               <a:rPr lang="es-BO" smtClean="0"/>
-              <a:t>1/6/2026</a:t>
             </a:fld>
             <a:endParaRPr lang="es-BO"/>
           </a:p>
@@ -2597,13 +2238,7 @@
       </p:sp>
       <p:sp>
         <p:nvSpPr>
-          <p:cNvPr id="6" name="Marcador de pie de página 5">
-            <a:extLst>
-              <a:ext uri="{FF2B5EF4-FFF2-40B4-BE49-F238E27FC236}">
-                <a16:creationId xmlns:a16="http://schemas.microsoft.com/office/drawing/2014/main" id="{0CB5D5B9-3CDB-4A20-BAE9-9472BD0776B0}"/>
-              </a:ext>
-            </a:extLst>
-          </p:cNvPr>
+          <p:cNvPr id="6" name="Marcador de pie de página 5"/>
           <p:cNvSpPr>
             <a:spLocks noGrp="1"/>
           </p:cNvSpPr>
@@ -2622,13 +2257,7 @@
       </p:sp>
       <p:sp>
         <p:nvSpPr>
-          <p:cNvPr id="7" name="Marcador de número de diapositiva 6">
-            <a:extLst>
-              <a:ext uri="{FF2B5EF4-FFF2-40B4-BE49-F238E27FC236}">
-                <a16:creationId xmlns:a16="http://schemas.microsoft.com/office/drawing/2014/main" id="{FF3B7EEA-1C7D-4754-9BC9-BE8C7669938A}"/>
-              </a:ext>
-            </a:extLst>
-          </p:cNvPr>
+          <p:cNvPr id="7" name="Marcador de número de diapositiva 6"/>
           <p:cNvSpPr>
             <a:spLocks noGrp="1"/>
           </p:cNvSpPr>
@@ -2643,18 +2272,12 @@
           <a:p>
             <a:fld id="{54302F1C-750C-4CC0-BD62-0C064DD2F842}" type="slidenum">
               <a:rPr lang="es-BO" smtClean="0"/>
-              <a:t>‹Nº›</a:t>
             </a:fld>
             <a:endParaRPr lang="es-BO"/>
           </a:p>
         </p:txBody>
       </p:sp>
     </p:spTree>
-    <p:extLst>
-      <p:ext uri="{BB962C8B-B14F-4D97-AF65-F5344CB8AC3E}">
-        <p14:creationId xmlns:p14="http://schemas.microsoft.com/office/powerpoint/2010/main" val="3536342579"/>
-      </p:ext>
-    </p:extLst>
   </p:cSld>
   <p:clrMapOvr>
     <a:masterClrMapping/>
@@ -2681,13 +2304,7 @@
       </p:grpSpPr>
       <p:sp>
         <p:nvSpPr>
-          <p:cNvPr id="2" name="Título 1">
-            <a:extLst>
-              <a:ext uri="{FF2B5EF4-FFF2-40B4-BE49-F238E27FC236}">
-                <a16:creationId xmlns:a16="http://schemas.microsoft.com/office/drawing/2014/main" id="{B9DCFBC9-E5D4-4BA3-BE0B-67CB79666971}"/>
-              </a:ext>
-            </a:extLst>
-          </p:cNvPr>
+          <p:cNvPr id="2" name="Título 1"/>
           <p:cNvSpPr>
             <a:spLocks noGrp="1"/>
           </p:cNvSpPr>
@@ -2719,13 +2336,7 @@
       </p:sp>
       <p:sp>
         <p:nvSpPr>
-          <p:cNvPr id="3" name="Marcador de posición de imagen 2">
-            <a:extLst>
-              <a:ext uri="{FF2B5EF4-FFF2-40B4-BE49-F238E27FC236}">
-                <a16:creationId xmlns:a16="http://schemas.microsoft.com/office/drawing/2014/main" id="{564D2077-AE5F-4304-A904-967180FA8568}"/>
-              </a:ext>
-            </a:extLst>
-          </p:cNvPr>
+          <p:cNvPr id="3" name="Marcador de posición de imagen 2"/>
           <p:cNvSpPr>
             <a:spLocks noGrp="1"/>
           </p:cNvSpPr>
@@ -2786,18 +2397,12 @@
       </p:sp>
       <p:sp>
         <p:nvSpPr>
-          <p:cNvPr id="4" name="Marcador de texto 3">
-            <a:extLst>
-              <a:ext uri="{FF2B5EF4-FFF2-40B4-BE49-F238E27FC236}">
-                <a16:creationId xmlns:a16="http://schemas.microsoft.com/office/drawing/2014/main" id="{75264943-62BC-41DC-8F03-9ED6FB52E0AF}"/>
-              </a:ext>
-            </a:extLst>
-          </p:cNvPr>
-          <p:cNvSpPr>
-            <a:spLocks noGrp="1"/>
-          </p:cNvSpPr>
-          <p:nvPr>
-            <p:ph type="body" sz="half" idx="2"/>
+          <p:cNvPr id="4" name="Marcador de texto 3"/>
+          <p:cNvSpPr>
+            <a:spLocks noGrp="1"/>
+          </p:cNvSpPr>
+          <p:nvPr>
+            <p:ph type="body" sz="half" idx="2" hasCustomPrompt="1"/>
           </p:nvPr>
         </p:nvSpPr>
         <p:spPr>
@@ -2852,18 +2457,13 @@
               <a:rPr lang="es-ES"/>
               <a:t>Haga clic para modificar los estilos de texto del patrón</a:t>
             </a:r>
-          </a:p>
-        </p:txBody>
-      </p:sp>
-      <p:sp>
-        <p:nvSpPr>
-          <p:cNvPr id="5" name="Marcador de fecha 4">
-            <a:extLst>
-              <a:ext uri="{FF2B5EF4-FFF2-40B4-BE49-F238E27FC236}">
-                <a16:creationId xmlns:a16="http://schemas.microsoft.com/office/drawing/2014/main" id="{A29787F6-FE05-44EB-AB3D-B17250D6AD40}"/>
-              </a:ext>
-            </a:extLst>
-          </p:cNvPr>
+            <a:endParaRPr lang="es-ES"/>
+          </a:p>
+        </p:txBody>
+      </p:sp>
+      <p:sp>
+        <p:nvSpPr>
+          <p:cNvPr id="5" name="Marcador de fecha 4"/>
           <p:cNvSpPr>
             <a:spLocks noGrp="1"/>
           </p:cNvSpPr>
@@ -2878,7 +2478,6 @@
           <a:p>
             <a:fld id="{A630C2E1-33D6-40E1-80A6-0C7BC2346BD4}" type="datetimeFigureOut">
               <a:rPr lang="es-BO" smtClean="0"/>
-              <a:t>1/6/2026</a:t>
             </a:fld>
             <a:endParaRPr lang="es-BO"/>
           </a:p>
@@ -2886,13 +2485,7 @@
       </p:sp>
       <p:sp>
         <p:nvSpPr>
-          <p:cNvPr id="6" name="Marcador de pie de página 5">
-            <a:extLst>
-              <a:ext uri="{FF2B5EF4-FFF2-40B4-BE49-F238E27FC236}">
-                <a16:creationId xmlns:a16="http://schemas.microsoft.com/office/drawing/2014/main" id="{7C58131D-B839-43C9-BB3F-34E1C6A89353}"/>
-              </a:ext>
-            </a:extLst>
-          </p:cNvPr>
+          <p:cNvPr id="6" name="Marcador de pie de página 5"/>
           <p:cNvSpPr>
             <a:spLocks noGrp="1"/>
           </p:cNvSpPr>
@@ -2911,13 +2504,7 @@
       </p:sp>
       <p:sp>
         <p:nvSpPr>
-          <p:cNvPr id="7" name="Marcador de número de diapositiva 6">
-            <a:extLst>
-              <a:ext uri="{FF2B5EF4-FFF2-40B4-BE49-F238E27FC236}">
-                <a16:creationId xmlns:a16="http://schemas.microsoft.com/office/drawing/2014/main" id="{64E9F59F-2261-4807-8F6F-6FB01A071AE8}"/>
-              </a:ext>
-            </a:extLst>
-          </p:cNvPr>
+          <p:cNvPr id="7" name="Marcador de número de diapositiva 6"/>
           <p:cNvSpPr>
             <a:spLocks noGrp="1"/>
           </p:cNvSpPr>
@@ -2932,18 +2519,12 @@
           <a:p>
             <a:fld id="{54302F1C-750C-4CC0-BD62-0C064DD2F842}" type="slidenum">
               <a:rPr lang="es-BO" smtClean="0"/>
-              <a:t>‹Nº›</a:t>
             </a:fld>
             <a:endParaRPr lang="es-BO"/>
           </a:p>
         </p:txBody>
       </p:sp>
     </p:spTree>
-    <p:extLst>
-      <p:ext uri="{BB962C8B-B14F-4D97-AF65-F5344CB8AC3E}">
-        <p14:creationId xmlns:p14="http://schemas.microsoft.com/office/powerpoint/2010/main" val="8864067"/>
-      </p:ext>
-    </p:extLst>
   </p:cSld>
   <p:clrMapOvr>
     <a:masterClrMapping/>
@@ -2978,13 +2559,7 @@
       </p:grpSpPr>
       <p:sp>
         <p:nvSpPr>
-          <p:cNvPr id="2" name="Marcador de título 1">
-            <a:extLst>
-              <a:ext uri="{FF2B5EF4-FFF2-40B4-BE49-F238E27FC236}">
-                <a16:creationId xmlns:a16="http://schemas.microsoft.com/office/drawing/2014/main" id="{87C8D65B-D386-48A8-9206-F868CE7BA630}"/>
-              </a:ext>
-            </a:extLst>
-          </p:cNvPr>
+          <p:cNvPr id="2" name="Marcador de título 1"/>
           <p:cNvSpPr>
             <a:spLocks noGrp="1"/>
           </p:cNvSpPr>
@@ -3017,13 +2592,7 @@
       </p:sp>
       <p:sp>
         <p:nvSpPr>
-          <p:cNvPr id="3" name="Marcador de texto 2">
-            <a:extLst>
-              <a:ext uri="{FF2B5EF4-FFF2-40B4-BE49-F238E27FC236}">
-                <a16:creationId xmlns:a16="http://schemas.microsoft.com/office/drawing/2014/main" id="{E49A9D70-7D4F-4D0A-8AB2-3F85A7F16B52}"/>
-              </a:ext>
-            </a:extLst>
-          </p:cNvPr>
+          <p:cNvPr id="3" name="Marcador de texto 2"/>
           <p:cNvSpPr>
             <a:spLocks noGrp="1"/>
           </p:cNvSpPr>
@@ -3051,6 +2620,7 @@
               <a:rPr lang="es-ES"/>
               <a:t>Haga clic para modificar los estilos de texto del patrón</a:t>
             </a:r>
+            <a:endParaRPr lang="es-ES"/>
           </a:p>
           <a:p>
             <a:pPr lvl="1"/>
@@ -3058,6 +2628,7 @@
               <a:rPr lang="es-ES"/>
               <a:t>Segundo nivel</a:t>
             </a:r>
+            <a:endParaRPr lang="es-ES"/>
           </a:p>
           <a:p>
             <a:pPr lvl="2"/>
@@ -3065,6 +2636,7 @@
               <a:rPr lang="es-ES"/>
               <a:t>Tercer nivel</a:t>
             </a:r>
+            <a:endParaRPr lang="es-ES"/>
           </a:p>
           <a:p>
             <a:pPr lvl="3"/>
@@ -3072,6 +2644,7 @@
               <a:rPr lang="es-ES"/>
               <a:t>Cuarto nivel</a:t>
             </a:r>
+            <a:endParaRPr lang="es-ES"/>
           </a:p>
           <a:p>
             <a:pPr lvl="4"/>
@@ -3085,13 +2658,7 @@
       </p:sp>
       <p:sp>
         <p:nvSpPr>
-          <p:cNvPr id="4" name="Marcador de fecha 3">
-            <a:extLst>
-              <a:ext uri="{FF2B5EF4-FFF2-40B4-BE49-F238E27FC236}">
-                <a16:creationId xmlns:a16="http://schemas.microsoft.com/office/drawing/2014/main" id="{77FFDC84-D71D-436A-B966-3D70CC39FD1D}"/>
-              </a:ext>
-            </a:extLst>
-          </p:cNvPr>
+          <p:cNvPr id="4" name="Marcador de fecha 3"/>
           <p:cNvSpPr>
             <a:spLocks noGrp="1"/>
           </p:cNvSpPr>
@@ -3124,7 +2691,6 @@
           <a:p>
             <a:fld id="{A630C2E1-33D6-40E1-80A6-0C7BC2346BD4}" type="datetimeFigureOut">
               <a:rPr lang="es-BO" smtClean="0"/>
-              <a:t>1/6/2026</a:t>
             </a:fld>
             <a:endParaRPr lang="es-BO"/>
           </a:p>
@@ -3132,13 +2698,7 @@
       </p:sp>
       <p:sp>
         <p:nvSpPr>
-          <p:cNvPr id="5" name="Marcador de pie de página 4">
-            <a:extLst>
-              <a:ext uri="{FF2B5EF4-FFF2-40B4-BE49-F238E27FC236}">
-                <a16:creationId xmlns:a16="http://schemas.microsoft.com/office/drawing/2014/main" id="{1DC766A0-6629-4A09-A43C-FF6B440D5DCD}"/>
-              </a:ext>
-            </a:extLst>
-          </p:cNvPr>
+          <p:cNvPr id="5" name="Marcador de pie de página 4"/>
           <p:cNvSpPr>
             <a:spLocks noGrp="1"/>
           </p:cNvSpPr>
@@ -3175,13 +2735,7 @@
       </p:sp>
       <p:sp>
         <p:nvSpPr>
-          <p:cNvPr id="6" name="Marcador de número de diapositiva 5">
-            <a:extLst>
-              <a:ext uri="{FF2B5EF4-FFF2-40B4-BE49-F238E27FC236}">
-                <a16:creationId xmlns:a16="http://schemas.microsoft.com/office/drawing/2014/main" id="{C96F949C-B3F0-4021-8757-6AAF9D78BF9D}"/>
-              </a:ext>
-            </a:extLst>
-          </p:cNvPr>
+          <p:cNvPr id="6" name="Marcador de número de diapositiva 5"/>
           <p:cNvSpPr>
             <a:spLocks noGrp="1"/>
           </p:cNvSpPr>
@@ -3214,18 +2768,12 @@
           <a:p>
             <a:fld id="{54302F1C-750C-4CC0-BD62-0C064DD2F842}" type="slidenum">
               <a:rPr lang="es-BO" smtClean="0"/>
-              <a:t>‹Nº›</a:t>
             </a:fld>
             <a:endParaRPr lang="es-BO"/>
           </a:p>
         </p:txBody>
       </p:sp>
     </p:spTree>
-    <p:extLst>
-      <p:ext uri="{BB962C8B-B14F-4D97-AF65-F5344CB8AC3E}">
-        <p14:creationId xmlns:p14="http://schemas.microsoft.com/office/powerpoint/2010/main" val="2884447345"/>
-      </p:ext>
-    </p:extLst>
   </p:cSld>
   <p:clrMap bg1="lt1" tx1="dk1" bg2="lt2" tx2="dk2" accent1="accent1" accent2="accent2" accent3="accent3" accent4="accent4" accent5="accent5" accent6="accent6" hlink="hlink" folHlink="folHlink"/>
   <p:sldLayoutIdLst>
@@ -3543,13 +3091,7 @@
       </p:grpSpPr>
       <p:sp>
         <p:nvSpPr>
-          <p:cNvPr id="2" name="Título 1">
-            <a:extLst>
-              <a:ext uri="{FF2B5EF4-FFF2-40B4-BE49-F238E27FC236}">
-                <a16:creationId xmlns:a16="http://schemas.microsoft.com/office/drawing/2014/main" id="{9ECEE568-2836-43BC-A3F6-32280E2BD061}"/>
-              </a:ext>
-            </a:extLst>
-          </p:cNvPr>
+          <p:cNvPr id="2" name="Título 1"/>
           <p:cNvSpPr>
             <a:spLocks noGrp="1"/>
           </p:cNvSpPr>
@@ -3586,13 +3128,7 @@
       </p:sp>
       <p:sp>
         <p:nvSpPr>
-          <p:cNvPr id="3" name="Subtítulo 2">
-            <a:extLst>
-              <a:ext uri="{FF2B5EF4-FFF2-40B4-BE49-F238E27FC236}">
-                <a16:creationId xmlns:a16="http://schemas.microsoft.com/office/drawing/2014/main" id="{2C746470-52D7-4808-A2CC-9D591EA8F690}"/>
-              </a:ext>
-            </a:extLst>
-          </p:cNvPr>
+          <p:cNvPr id="3" name="Subtítulo 2"/>
           <p:cNvSpPr>
             <a:spLocks noGrp="1"/>
           </p:cNvSpPr>
@@ -3616,6 +3152,14 @@
               </a:rPr>
               <a:t>Auditoria Informática y Automatización de Datos</a:t>
             </a:r>
+            <a:endParaRPr lang="es-MX" dirty="0">
+              <a:solidFill>
+                <a:schemeClr val="bg1"/>
+              </a:solidFill>
+              <a:highlight>
+                <a:srgbClr val="00FF00"/>
+              </a:highlight>
+            </a:endParaRPr>
           </a:p>
           <a:p>
             <a:endParaRPr lang="es-MX" dirty="0">
@@ -3670,11 +3214,6 @@
         </p:txBody>
       </p:sp>
     </p:spTree>
-    <p:extLst>
-      <p:ext uri="{BB962C8B-B14F-4D97-AF65-F5344CB8AC3E}">
-        <p14:creationId xmlns:p14="http://schemas.microsoft.com/office/powerpoint/2010/main" val="3425537472"/>
-      </p:ext>
-    </p:extLst>
   </p:cSld>
   <p:clrMapOvr>
     <a:masterClrMapping/>
@@ -3701,13 +3240,7 @@
       </p:grpSpPr>
       <p:sp>
         <p:nvSpPr>
-          <p:cNvPr id="2" name="Título 1">
-            <a:extLst>
-              <a:ext uri="{FF2B5EF4-FFF2-40B4-BE49-F238E27FC236}">
-                <a16:creationId xmlns:a16="http://schemas.microsoft.com/office/drawing/2014/main" id="{0EF5DB1E-C685-4C0D-B673-787E1429300E}"/>
-              </a:ext>
-            </a:extLst>
-          </p:cNvPr>
+          <p:cNvPr id="2" name="Título 1"/>
           <p:cNvSpPr>
             <a:spLocks noGrp="1"/>
           </p:cNvSpPr>
@@ -3745,13 +3278,7 @@
       </p:sp>
       <p:sp>
         <p:nvSpPr>
-          <p:cNvPr id="3" name="Marcador de contenido 2">
-            <a:extLst>
-              <a:ext uri="{FF2B5EF4-FFF2-40B4-BE49-F238E27FC236}">
-                <a16:creationId xmlns:a16="http://schemas.microsoft.com/office/drawing/2014/main" id="{4B08BCEE-166C-43A0-9266-B87CFA9FBC46}"/>
-              </a:ext>
-            </a:extLst>
-          </p:cNvPr>
+          <p:cNvPr id="3" name="Marcador de contenido 2"/>
           <p:cNvSpPr>
             <a:spLocks noGrp="1"/>
           </p:cNvSpPr>
@@ -3788,23 +3315,11 @@
       </p:sp>
       <p:graphicFrame>
         <p:nvGraphicFramePr>
-          <p:cNvPr id="6" name="Objeto 5">
-            <a:extLst>
-              <a:ext uri="{FF2B5EF4-FFF2-40B4-BE49-F238E27FC236}">
-                <a16:creationId xmlns:a16="http://schemas.microsoft.com/office/drawing/2014/main" id="{C09CCC56-7EB7-4D6B-BA34-F5A393CEBB31}"/>
-              </a:ext>
-            </a:extLst>
-          </p:cNvPr>
+          <p:cNvPr id="6" name="Objeto 5"/>
           <p:cNvGraphicFramePr>
             <a:graphicFrameLocks noChangeAspect="1"/>
           </p:cNvGraphicFramePr>
-          <p:nvPr>
-            <p:extLst>
-              <p:ext uri="{D42A27DB-BD31-4B8C-83A1-F6EECF244321}">
-                <p14:modId xmlns:p14="http://schemas.microsoft.com/office/powerpoint/2010/main" val="4212055590"/>
-              </p:ext>
-            </p:extLst>
-          </p:nvPr>
+          <p:nvPr/>
         </p:nvGraphicFramePr>
         <p:xfrm>
           <a:off x="4825917" y="3008563"/>
@@ -3814,21 +3329,21 @@
           <a:graphicData uri="http://schemas.openxmlformats.org/presentationml/2006/ole">
             <mc:AlternateContent xmlns:mc="http://schemas.openxmlformats.org/markup-compatibility/2006">
               <mc:Choice xmlns:v="urn:schemas-microsoft-com:vml" Requires="v">
-                <p:oleObj spid="_x0000_s1029" name="Worksheet" r:id="rId3" imgW="1609898" imgH="2105198" progId="Excel.Sheet.12">
+                <p:oleObj spid="_x0000_s1031" name="Worksheet" r:id="rId1" imgW="1689735" imgH="2206625" progId="Excel.Sheet.12">
                   <p:link updateAutomatic="1"/>
                 </p:oleObj>
               </mc:Choice>
               <mc:Fallback>
-                <p:oleObj name="Worksheet" r:id="rId3" imgW="1609898" imgH="2105198" progId="Excel.Sheet.12">
+                <p:oleObj name="Worksheet" r:id="rId1" imgW="1689735" imgH="2206625" progId="Excel.Sheet.12">
                   <p:link updateAutomatic="1"/>
                   <p:pic>
                     <p:nvPicPr>
-                      <p:cNvPr id="0" name=""/>
+                      <p:cNvPr id="0" name="Imagen 1030"/>
                       <p:cNvPicPr/>
                       <p:nvPr/>
                     </p:nvPicPr>
                     <p:blipFill>
-                      <a:blip r:embed="rId4"/>
+                      <a:blip r:embed="rId2"/>
                       <a:stretch>
                         <a:fillRect/>
                       </a:stretch>
@@ -3850,11 +3365,6 @@
         </a:graphic>
       </p:graphicFrame>
     </p:spTree>
-    <p:extLst>
-      <p:ext uri="{BB962C8B-B14F-4D97-AF65-F5344CB8AC3E}">
-        <p14:creationId xmlns:p14="http://schemas.microsoft.com/office/powerpoint/2010/main" val="4112217688"/>
-      </p:ext>
-    </p:extLst>
   </p:cSld>
   <p:clrMapOvr>
     <a:masterClrMapping/>
@@ -3881,13 +3391,7 @@
       </p:grpSpPr>
       <p:sp>
         <p:nvSpPr>
-          <p:cNvPr id="2" name="Título 1">
-            <a:extLst>
-              <a:ext uri="{FF2B5EF4-FFF2-40B4-BE49-F238E27FC236}">
-                <a16:creationId xmlns:a16="http://schemas.microsoft.com/office/drawing/2014/main" id="{A3B3DECD-0AC6-4114-BB9E-1A469884A2C6}"/>
-              </a:ext>
-            </a:extLst>
-          </p:cNvPr>
+          <p:cNvPr id="2" name="Título 1"/>
           <p:cNvSpPr>
             <a:spLocks noGrp="1"/>
           </p:cNvSpPr>
@@ -3925,13 +3429,7 @@
       </p:sp>
       <p:sp>
         <p:nvSpPr>
-          <p:cNvPr id="3" name="Marcador de contenido 2">
-            <a:extLst>
-              <a:ext uri="{FF2B5EF4-FFF2-40B4-BE49-F238E27FC236}">
-                <a16:creationId xmlns:a16="http://schemas.microsoft.com/office/drawing/2014/main" id="{7212EBE7-89D2-4489-A0AA-7E9A91F77144}"/>
-              </a:ext>
-            </a:extLst>
-          </p:cNvPr>
+          <p:cNvPr id="3" name="Marcador de contenido 2"/>
           <p:cNvSpPr>
             <a:spLocks noGrp="1"/>
           </p:cNvSpPr>
@@ -3968,23 +3466,11 @@
       </p:sp>
       <p:graphicFrame>
         <p:nvGraphicFramePr>
-          <p:cNvPr id="5" name="Objeto 4">
-            <a:extLst>
-              <a:ext uri="{FF2B5EF4-FFF2-40B4-BE49-F238E27FC236}">
-                <a16:creationId xmlns:a16="http://schemas.microsoft.com/office/drawing/2014/main" id="{C5294320-4883-498D-AC2A-850742E71358}"/>
-              </a:ext>
-            </a:extLst>
-          </p:cNvPr>
+          <p:cNvPr id="5" name="Objeto 4"/>
           <p:cNvGraphicFramePr>
             <a:graphicFrameLocks noChangeAspect="1"/>
           </p:cNvGraphicFramePr>
-          <p:nvPr>
-            <p:extLst>
-              <p:ext uri="{D42A27DB-BD31-4B8C-83A1-F6EECF244321}">
-                <p14:modId xmlns:p14="http://schemas.microsoft.com/office/powerpoint/2010/main" val="2618280837"/>
-              </p:ext>
-            </p:extLst>
-          </p:nvPr>
+          <p:nvPr/>
         </p:nvGraphicFramePr>
         <p:xfrm>
           <a:off x="3527509" y="3052679"/>
@@ -3994,21 +3480,21 @@
           <a:graphicData uri="http://schemas.openxmlformats.org/presentationml/2006/ole">
             <mc:AlternateContent xmlns:mc="http://schemas.openxmlformats.org/markup-compatibility/2006">
               <mc:Choice xmlns:v="urn:schemas-microsoft-com:vml" Requires="v">
-                <p:oleObj spid="_x0000_s2051" name="Worksheet" r:id="rId3" imgW="4238798" imgH="1343198" progId="Excel.Sheet.12">
+                <p:oleObj spid="_x0000_s2053" name="Worksheet" r:id="rId1" imgW="4432935" imgH="1411605" progId="Excel.Sheet.12">
                   <p:link updateAutomatic="1"/>
                 </p:oleObj>
               </mc:Choice>
               <mc:Fallback>
-                <p:oleObj name="Worksheet" r:id="rId3" imgW="4238798" imgH="1343198" progId="Excel.Sheet.12">
+                <p:oleObj name="Worksheet" r:id="rId1" imgW="4432935" imgH="1411605" progId="Excel.Sheet.12">
                   <p:link updateAutomatic="1"/>
                   <p:pic>
                     <p:nvPicPr>
-                      <p:cNvPr id="0" name=""/>
+                      <p:cNvPr id="0" name="Imagen 2052"/>
                       <p:cNvPicPr/>
                       <p:nvPr/>
                     </p:nvPicPr>
                     <p:blipFill>
-                      <a:blip r:embed="rId4"/>
+                      <a:blip r:embed="rId2"/>
                       <a:stretch>
                         <a:fillRect/>
                       </a:stretch>
@@ -4030,11 +3516,6 @@
         </a:graphic>
       </p:graphicFrame>
     </p:spTree>
-    <p:extLst>
-      <p:ext uri="{BB962C8B-B14F-4D97-AF65-F5344CB8AC3E}">
-        <p14:creationId xmlns:p14="http://schemas.microsoft.com/office/powerpoint/2010/main" val="3364417328"/>
-      </p:ext>
-    </p:extLst>
   </p:cSld>
   <p:clrMapOvr>
     <a:masterClrMapping/>
@@ -4061,13 +3542,7 @@
       </p:grpSpPr>
       <p:sp>
         <p:nvSpPr>
-          <p:cNvPr id="2" name="Título 1">
-            <a:extLst>
-              <a:ext uri="{FF2B5EF4-FFF2-40B4-BE49-F238E27FC236}">
-                <a16:creationId xmlns:a16="http://schemas.microsoft.com/office/drawing/2014/main" id="{553C86F0-598C-46E0-A19D-E7E6BAA654AB}"/>
-              </a:ext>
-            </a:extLst>
-          </p:cNvPr>
+          <p:cNvPr id="2" name="Título 1"/>
           <p:cNvSpPr>
             <a:spLocks noGrp="1"/>
           </p:cNvSpPr>
@@ -4105,13 +3580,7 @@
       </p:sp>
       <p:sp>
         <p:nvSpPr>
-          <p:cNvPr id="3" name="Marcador de contenido 2">
-            <a:extLst>
-              <a:ext uri="{FF2B5EF4-FFF2-40B4-BE49-F238E27FC236}">
-                <a16:creationId xmlns:a16="http://schemas.microsoft.com/office/drawing/2014/main" id="{D33F8ADB-2490-42F7-ADDB-45590D278A15}"/>
-              </a:ext>
-            </a:extLst>
-          </p:cNvPr>
+          <p:cNvPr id="3" name="Marcador de contenido 2"/>
           <p:cNvSpPr>
             <a:spLocks noGrp="1"/>
           </p:cNvSpPr>
@@ -4148,23 +3617,11 @@
       </p:sp>
       <p:graphicFrame>
         <p:nvGraphicFramePr>
-          <p:cNvPr id="5" name="Objeto 4">
-            <a:extLst>
-              <a:ext uri="{FF2B5EF4-FFF2-40B4-BE49-F238E27FC236}">
-                <a16:creationId xmlns:a16="http://schemas.microsoft.com/office/drawing/2014/main" id="{F39FDD4A-6202-40C7-844F-731682FD4A15}"/>
-              </a:ext>
-            </a:extLst>
-          </p:cNvPr>
+          <p:cNvPr id="5" name="Objeto 4"/>
           <p:cNvGraphicFramePr>
             <a:graphicFrameLocks noChangeAspect="1"/>
           </p:cNvGraphicFramePr>
-          <p:nvPr>
-            <p:extLst>
-              <p:ext uri="{D42A27DB-BD31-4B8C-83A1-F6EECF244321}">
-                <p14:modId xmlns:p14="http://schemas.microsoft.com/office/powerpoint/2010/main" val="1558006723"/>
-              </p:ext>
-            </p:extLst>
-          </p:nvPr>
+          <p:nvPr/>
         </p:nvGraphicFramePr>
         <p:xfrm>
           <a:off x="4235367" y="3128879"/>
@@ -4174,21 +3631,21 @@
           <a:graphicData uri="http://schemas.openxmlformats.org/presentationml/2006/ole">
             <mc:AlternateContent xmlns:mc="http://schemas.openxmlformats.org/markup-compatibility/2006">
               <mc:Choice xmlns:v="urn:schemas-microsoft-com:vml" Requires="v">
-                <p:oleObj spid="_x0000_s3075" name="Worksheet" r:id="rId3" imgW="3095798" imgH="2105198" progId="Excel.Sheet.12">
+                <p:oleObj spid="_x0000_s3077" name="Worksheet" r:id="rId1" imgW="3240405" imgH="2206625" progId="Excel.Sheet.12">
                   <p:link updateAutomatic="1"/>
                 </p:oleObj>
               </mc:Choice>
               <mc:Fallback>
-                <p:oleObj name="Worksheet" r:id="rId3" imgW="3095798" imgH="2105198" progId="Excel.Sheet.12">
+                <p:oleObj name="Worksheet" r:id="rId1" imgW="3240405" imgH="2206625" progId="Excel.Sheet.12">
                   <p:link updateAutomatic="1"/>
                   <p:pic>
                     <p:nvPicPr>
-                      <p:cNvPr id="0" name=""/>
+                      <p:cNvPr id="0" name="Imagen 3076"/>
                       <p:cNvPicPr/>
                       <p:nvPr/>
                     </p:nvPicPr>
                     <p:blipFill>
-                      <a:blip r:embed="rId4"/>
+                      <a:blip r:embed="rId2"/>
                       <a:stretch>
                         <a:fillRect/>
                       </a:stretch>
@@ -4210,11 +3667,6 @@
         </a:graphic>
       </p:graphicFrame>
     </p:spTree>
-    <p:extLst>
-      <p:ext uri="{BB962C8B-B14F-4D97-AF65-F5344CB8AC3E}">
-        <p14:creationId xmlns:p14="http://schemas.microsoft.com/office/powerpoint/2010/main" val="439346728"/>
-      </p:ext>
-    </p:extLst>
   </p:cSld>
   <p:clrMapOvr>
     <a:masterClrMapping/>
@@ -4241,13 +3693,7 @@
       </p:grpSpPr>
       <p:sp>
         <p:nvSpPr>
-          <p:cNvPr id="2" name="Título 1">
-            <a:extLst>
-              <a:ext uri="{FF2B5EF4-FFF2-40B4-BE49-F238E27FC236}">
-                <a16:creationId xmlns:a16="http://schemas.microsoft.com/office/drawing/2014/main" id="{8E29B3CD-E7FC-41B0-BF7B-9343E11720F5}"/>
-              </a:ext>
-            </a:extLst>
-          </p:cNvPr>
+          <p:cNvPr id="2" name="Título 1"/>
           <p:cNvSpPr>
             <a:spLocks noGrp="1"/>
           </p:cNvSpPr>
@@ -4285,13 +3731,7 @@
       </p:sp>
       <p:sp>
         <p:nvSpPr>
-          <p:cNvPr id="3" name="Marcador de contenido 2">
-            <a:extLst>
-              <a:ext uri="{FF2B5EF4-FFF2-40B4-BE49-F238E27FC236}">
-                <a16:creationId xmlns:a16="http://schemas.microsoft.com/office/drawing/2014/main" id="{3F2794AA-2DC0-488C-A059-9647B9C26D3C}"/>
-              </a:ext>
-            </a:extLst>
-          </p:cNvPr>
+          <p:cNvPr id="3" name="Marcador de contenido 2"/>
           <p:cNvSpPr>
             <a:spLocks noGrp="1"/>
           </p:cNvSpPr>
@@ -4326,12 +3766,31 @@
           </a:p>
         </p:txBody>
       </p:sp>
+      <p:pic>
+        <p:nvPicPr>
+          <p:cNvPr id="4" name="Imagen 3"/>
+          <p:cNvPicPr>
+            <a:picLocks noChangeAspect="1"/>
+          </p:cNvPicPr>
+          <p:nvPr/>
+        </p:nvPicPr>
+        <p:blipFill>
+          <a:blip r:embed="rId1"/>
+          <a:stretch>
+            <a:fillRect/>
+          </a:stretch>
+        </p:blipFill>
+        <p:spPr>
+          <a:xfrm>
+            <a:off x="5152893" y="2967156"/>
+            <a:ext cx="1886213" cy="1886213"/>
+          </a:xfrm>
+          <a:prstGeom prst="rect">
+            <a:avLst/>
+          </a:prstGeom>
+        </p:spPr>
+      </p:pic>
     </p:spTree>
-    <p:extLst>
-      <p:ext uri="{BB962C8B-B14F-4D97-AF65-F5344CB8AC3E}">
-        <p14:creationId xmlns:p14="http://schemas.microsoft.com/office/powerpoint/2010/main" val="1470038673"/>
-      </p:ext>
-    </p:extLst>
   </p:cSld>
   <p:clrMapOvr>
     <a:masterClrMapping/>
@@ -4382,7 +3841,7 @@
     </a:clrScheme>
     <a:fontScheme name="Office">
       <a:majorFont>
-        <a:latin typeface="Calibri Light" panose="020F0302020204030204"/>
+        <a:latin typeface="Calibri Light"/>
         <a:ea typeface=""/>
         <a:cs typeface=""/>
         <a:font script="Jpan" typeface="游ゴシック Light"/>
@@ -4415,26 +3874,9 @@
         <a:font script="Viet" typeface="Times New Roman"/>
         <a:font script="Uigh" typeface="Microsoft Uighur"/>
         <a:font script="Geor" typeface="Sylfaen"/>
-        <a:font script="Armn" typeface="Arial"/>
-        <a:font script="Bugi" typeface="Leelawadee UI"/>
-        <a:font script="Bopo" typeface="Microsoft JhengHei"/>
-        <a:font script="Java" typeface="Javanese Text"/>
-        <a:font script="Lisu" typeface="Segoe UI"/>
-        <a:font script="Mymr" typeface="Myanmar Text"/>
-        <a:font script="Nkoo" typeface="Ebrima"/>
-        <a:font script="Olck" typeface="Nirmala UI"/>
-        <a:font script="Osma" typeface="Ebrima"/>
-        <a:font script="Phag" typeface="Phagspa"/>
-        <a:font script="Syrn" typeface="Estrangelo Edessa"/>
-        <a:font script="Syrj" typeface="Estrangelo Edessa"/>
-        <a:font script="Syre" typeface="Estrangelo Edessa"/>
-        <a:font script="Sora" typeface="Nirmala UI"/>
-        <a:font script="Tale" typeface="Microsoft Tai Le"/>
-        <a:font script="Talu" typeface="Microsoft New Tai Lue"/>
-        <a:font script="Tfng" typeface="Ebrima"/>
       </a:majorFont>
       <a:minorFont>
-        <a:latin typeface="Calibri" panose="020F0502020204030204"/>
+        <a:latin typeface="Calibri"/>
         <a:ea typeface=""/>
         <a:cs typeface=""/>
         <a:font script="Jpan" typeface="游ゴシック"/>
@@ -4467,23 +3909,6 @@
         <a:font script="Viet" typeface="Arial"/>
         <a:font script="Uigh" typeface="Microsoft Uighur"/>
         <a:font script="Geor" typeface="Sylfaen"/>
-        <a:font script="Armn" typeface="Arial"/>
-        <a:font script="Bugi" typeface="Leelawadee UI"/>
-        <a:font script="Bopo" typeface="Microsoft JhengHei"/>
-        <a:font script="Java" typeface="Javanese Text"/>
-        <a:font script="Lisu" typeface="Segoe UI"/>
-        <a:font script="Mymr" typeface="Myanmar Text"/>
-        <a:font script="Nkoo" typeface="Ebrima"/>
-        <a:font script="Olck" typeface="Nirmala UI"/>
-        <a:font script="Osma" typeface="Ebrima"/>
-        <a:font script="Phag" typeface="Phagspa"/>
-        <a:font script="Syrn" typeface="Estrangelo Edessa"/>
-        <a:font script="Syrj" typeface="Estrangelo Edessa"/>
-        <a:font script="Syre" typeface="Estrangelo Edessa"/>
-        <a:font script="Sora" typeface="Nirmala UI"/>
-        <a:font script="Tale" typeface="Microsoft Tai Le"/>
-        <a:font script="Talu" typeface="Microsoft New Tai Lue"/>
-        <a:font script="Tfng" typeface="Ebrima"/>
       </a:minorFont>
     </a:fontScheme>
     <a:fmtScheme name="Office">
@@ -4624,8 +4049,6 @@
       </a:bgFillStyleLst>
     </a:fmtScheme>
   </a:themeElements>
-  <a:objectDefaults/>
-  <a:extraClrSchemeLst/>
   <a:extLst>
     <a:ext uri="{05A4C25C-085E-4340-85A3-A5531E510DB2}">
       <thm15:themeFamily xmlns:thm15="http://schemas.microsoft.com/office/thememl/2012/main" name="Office Theme" id="{62F939B6-93AF-4DB8-9C6B-D6C7DFDC589F}" vid="{4A3C46E8-61CC-4603-A589-7422A47A8E4A}"/>
@@ -4677,7 +4100,7 @@
     </a:clrScheme>
     <a:fontScheme name="Office">
       <a:majorFont>
-        <a:latin typeface="Calibri Light" panose="020F0302020204030204"/>
+        <a:latin typeface="Calibri Light"/>
         <a:ea typeface=""/>
         <a:cs typeface=""/>
         <a:font script="Jpan" typeface="游ゴシック Light"/>
@@ -4710,26 +4133,9 @@
         <a:font script="Viet" typeface="Times New Roman"/>
         <a:font script="Uigh" typeface="Microsoft Uighur"/>
         <a:font script="Geor" typeface="Sylfaen"/>
-        <a:font script="Armn" typeface="Arial"/>
-        <a:font script="Bugi" typeface="Leelawadee UI"/>
-        <a:font script="Bopo" typeface="Microsoft JhengHei"/>
-        <a:font script="Java" typeface="Javanese Text"/>
-        <a:font script="Lisu" typeface="Segoe UI"/>
-        <a:font script="Mymr" typeface="Myanmar Text"/>
-        <a:font script="Nkoo" typeface="Ebrima"/>
-        <a:font script="Olck" typeface="Nirmala UI"/>
-        <a:font script="Osma" typeface="Ebrima"/>
-        <a:font script="Phag" typeface="Phagspa"/>
-        <a:font script="Syrn" typeface="Estrangelo Edessa"/>
-        <a:font script="Syrj" typeface="Estrangelo Edessa"/>
-        <a:font script="Syre" typeface="Estrangelo Edessa"/>
-        <a:font script="Sora" typeface="Nirmala UI"/>
-        <a:font script="Tale" typeface="Microsoft Tai Le"/>
-        <a:font script="Talu" typeface="Microsoft New Tai Lue"/>
-        <a:font script="Tfng" typeface="Ebrima"/>
       </a:majorFont>
       <a:minorFont>
-        <a:latin typeface="Calibri" panose="020F0502020204030204"/>
+        <a:latin typeface="Calibri"/>
         <a:ea typeface=""/>
         <a:cs typeface=""/>
         <a:font script="Jpan" typeface="游ゴシック"/>
@@ -4762,23 +4168,6 @@
         <a:font script="Viet" typeface="Arial"/>
         <a:font script="Uigh" typeface="Microsoft Uighur"/>
         <a:font script="Geor" typeface="Sylfaen"/>
-        <a:font script="Armn" typeface="Arial"/>
-        <a:font script="Bugi" typeface="Leelawadee UI"/>
-        <a:font script="Bopo" typeface="Microsoft JhengHei"/>
-        <a:font script="Java" typeface="Javanese Text"/>
-        <a:font script="Lisu" typeface="Segoe UI"/>
-        <a:font script="Mymr" typeface="Myanmar Text"/>
-        <a:font script="Nkoo" typeface="Ebrima"/>
-        <a:font script="Olck" typeface="Nirmala UI"/>
-        <a:font script="Osma" typeface="Ebrima"/>
-        <a:font script="Phag" typeface="Phagspa"/>
-        <a:font script="Syrn" typeface="Estrangelo Edessa"/>
-        <a:font script="Syrj" typeface="Estrangelo Edessa"/>
-        <a:font script="Syre" typeface="Estrangelo Edessa"/>
-        <a:font script="Sora" typeface="Nirmala UI"/>
-        <a:font script="Tale" typeface="Microsoft Tai Le"/>
-        <a:font script="Talu" typeface="Microsoft New Tai Lue"/>
-        <a:font script="Tfng" typeface="Ebrima"/>
       </a:minorFont>
     </a:fontScheme>
     <a:fmtScheme name="Office">
@@ -4919,8 +4308,6 @@
       </a:bgFillStyleLst>
     </a:fmtScheme>
   </a:themeElements>
-  <a:objectDefaults/>
-  <a:extraClrSchemeLst/>
   <a:extLst>
     <a:ext uri="{05A4C25C-085E-4340-85A3-A5531E510DB2}">
       <thm15:themeFamily xmlns:thm15="http://schemas.microsoft.com/office/thememl/2012/main" name="Office Theme" id="{62F939B6-93AF-4DB8-9C6B-D6C7DFDC589F}" vid="{4A3C46E8-61CC-4603-A589-7422A47A8E4A}"/>
